--- a/Pregrado/Trabajo de grado 3/Clases/Sesion 14 - Ajustes finales · seguimiento post-sustentación/Presentacion.pptx
+++ b/Pregrado/Trabajo de grado 3/Clases/Sesion 14 - Ajustes finales · seguimiento post-sustentación/Presentacion.pptx
@@ -3365,41 +3365,6 @@
                 <a:latin typeface="Calibri"/>
               </a:rPr>
               <a:t> TRABAJO DE GRADO 3</a:t>
-            </a:r>
-          </a:p>
-        </p:txBody>
-      </p:sp>
-      <p:sp>
-        <p:nvSpPr>
-          <p:cNvPr id="7" name="TextBox 6"/>
-          <p:cNvSpPr txBox="1"/>
-          <p:nvPr/>
-        </p:nvSpPr>
-        <p:spPr>
-          <a:xfrm>
-            <a:off x="2194560" y="6446520"/>
-            <a:ext cx="5943600" cy="274320"/>
-          </a:xfrm>
-          <a:prstGeom prst="rect">
-            <a:avLst/>
-          </a:prstGeom>
-          <a:noFill/>
-        </p:spPr>
-        <p:txBody>
-          <a:bodyPr wrap="square" anchor="t" lIns="0" rIns="0" tIns="0" bIns="0">
-            <a:spAutoFit/>
-          </a:bodyPr>
-          <a:lstStyle/>
-          <a:p>
-            <a:pPr algn="l"/>
-            <a:r>
-              <a:rPr sz="1000" b="1" i="0">
-                <a:solidFill>
-                  <a:srgbClr val="8F989D"/>
-                </a:solidFill>
-                <a:latin typeface="Calibri"/>
-              </a:rPr>
-              <a:t>Inicio 5:10 pm</a:t>
             </a:r>
           </a:p>
         </p:txBody>
@@ -4147,41 +4112,6 @@
         </p:nvSpPr>
         <p:spPr>
           <a:xfrm>
-            <a:off x="2194560" y="6446520"/>
-            <a:ext cx="5943600" cy="274320"/>
-          </a:xfrm>
-          <a:prstGeom prst="rect">
-            <a:avLst/>
-          </a:prstGeom>
-          <a:noFill/>
-        </p:spPr>
-        <p:txBody>
-          <a:bodyPr wrap="square" anchor="t" lIns="0" rIns="0" tIns="0" bIns="0">
-            <a:spAutoFit/>
-          </a:bodyPr>
-          <a:lstStyle/>
-          <a:p>
-            <a:pPr algn="l"/>
-            <a:r>
-              <a:rPr sz="1000" b="1" i="0">
-                <a:solidFill>
-                  <a:srgbClr val="8F989D"/>
-                </a:solidFill>
-                <a:latin typeface="Calibri"/>
-              </a:rPr>
-              <a:t>Inicio 5:10 pm</a:t>
-            </a:r>
-          </a:p>
-        </p:txBody>
-      </p:sp>
-      <p:sp>
-        <p:nvSpPr>
-          <p:cNvPr id="7" name="TextBox 6"/>
-          <p:cNvSpPr txBox="1"/>
-          <p:nvPr/>
-        </p:nvSpPr>
-        <p:spPr>
-          <a:xfrm>
             <a:off x="11094415" y="6446520"/>
             <a:ext cx="548640" cy="274320"/>
           </a:xfrm>
@@ -4750,41 +4680,6 @@
         </p:nvSpPr>
         <p:spPr>
           <a:xfrm>
-            <a:off x="2194560" y="6446520"/>
-            <a:ext cx="5943600" cy="274320"/>
-          </a:xfrm>
-          <a:prstGeom prst="rect">
-            <a:avLst/>
-          </a:prstGeom>
-          <a:noFill/>
-        </p:spPr>
-        <p:txBody>
-          <a:bodyPr wrap="square" anchor="t" lIns="0" rIns="0" tIns="0" bIns="0">
-            <a:spAutoFit/>
-          </a:bodyPr>
-          <a:lstStyle/>
-          <a:p>
-            <a:pPr algn="l"/>
-            <a:r>
-              <a:rPr sz="1000" b="1" i="0">
-                <a:solidFill>
-                  <a:srgbClr val="8F989D"/>
-                </a:solidFill>
-                <a:latin typeface="Calibri"/>
-              </a:rPr>
-              <a:t>Inicio 5:10 pm</a:t>
-            </a:r>
-          </a:p>
-        </p:txBody>
-      </p:sp>
-      <p:sp>
-        <p:nvSpPr>
-          <p:cNvPr id="6" name="TextBox 5"/>
-          <p:cNvSpPr txBox="1"/>
-          <p:nvPr/>
-        </p:nvSpPr>
-        <p:spPr>
-          <a:xfrm>
             <a:off x="11094415" y="6446520"/>
             <a:ext cx="548640" cy="274320"/>
           </a:xfrm>
@@ -4998,41 +4893,6 @@
         </p:nvSpPr>
         <p:spPr>
           <a:xfrm>
-            <a:off x="2194560" y="6446520"/>
-            <a:ext cx="5943600" cy="274320"/>
-          </a:xfrm>
-          <a:prstGeom prst="rect">
-            <a:avLst/>
-          </a:prstGeom>
-          <a:noFill/>
-        </p:spPr>
-        <p:txBody>
-          <a:bodyPr wrap="square" anchor="t" lIns="0" rIns="0" tIns="0" bIns="0">
-            <a:spAutoFit/>
-          </a:bodyPr>
-          <a:lstStyle/>
-          <a:p>
-            <a:pPr algn="l"/>
-            <a:r>
-              <a:rPr sz="1000" b="1" i="0">
-                <a:solidFill>
-                  <a:srgbClr val="8F989D"/>
-                </a:solidFill>
-                <a:latin typeface="Calibri"/>
-              </a:rPr>
-              <a:t>Inicio 5:10 pm</a:t>
-            </a:r>
-          </a:p>
-        </p:txBody>
-      </p:sp>
-      <p:sp>
-        <p:nvSpPr>
-          <p:cNvPr id="6" name="TextBox 5"/>
-          <p:cNvSpPr txBox="1"/>
-          <p:nvPr/>
-        </p:nvSpPr>
-        <p:spPr>
-          <a:xfrm>
             <a:off x="11094415" y="6446520"/>
             <a:ext cx="548640" cy="274320"/>
           </a:xfrm>
@@ -5448,41 +5308,6 @@
         </p:nvSpPr>
         <p:spPr>
           <a:xfrm>
-            <a:off x="2194560" y="6446520"/>
-            <a:ext cx="5943600" cy="274320"/>
-          </a:xfrm>
-          <a:prstGeom prst="rect">
-            <a:avLst/>
-          </a:prstGeom>
-          <a:noFill/>
-        </p:spPr>
-        <p:txBody>
-          <a:bodyPr wrap="square" anchor="t" lIns="0" rIns="0" tIns="0" bIns="0">
-            <a:spAutoFit/>
-          </a:bodyPr>
-          <a:lstStyle/>
-          <a:p>
-            <a:pPr algn="l"/>
-            <a:r>
-              <a:rPr sz="1000" b="1" i="0">
-                <a:solidFill>
-                  <a:srgbClr val="8F989D"/>
-                </a:solidFill>
-                <a:latin typeface="Calibri"/>
-              </a:rPr>
-              <a:t>Inicio 5:10 pm</a:t>
-            </a:r>
-          </a:p>
-        </p:txBody>
-      </p:sp>
-      <p:sp>
-        <p:nvSpPr>
-          <p:cNvPr id="6" name="TextBox 5"/>
-          <p:cNvSpPr txBox="1"/>
-          <p:nvPr/>
-        </p:nvSpPr>
-        <p:spPr>
-          <a:xfrm>
             <a:off x="11094415" y="6446520"/>
             <a:ext cx="548640" cy="274320"/>
           </a:xfrm>
@@ -6053,41 +5878,6 @@
         </p:nvSpPr>
         <p:spPr>
           <a:xfrm>
-            <a:off x="2194560" y="6446520"/>
-            <a:ext cx="5943600" cy="274320"/>
-          </a:xfrm>
-          <a:prstGeom prst="rect">
-            <a:avLst/>
-          </a:prstGeom>
-          <a:noFill/>
-        </p:spPr>
-        <p:txBody>
-          <a:bodyPr wrap="square" anchor="t" lIns="0" rIns="0" tIns="0" bIns="0">
-            <a:spAutoFit/>
-          </a:bodyPr>
-          <a:lstStyle/>
-          <a:p>
-            <a:pPr algn="l"/>
-            <a:r>
-              <a:rPr sz="1000" b="1" i="0">
-                <a:solidFill>
-                  <a:srgbClr val="8F989D"/>
-                </a:solidFill>
-                <a:latin typeface="Calibri"/>
-              </a:rPr>
-              <a:t>Inicio 5:10 pm</a:t>
-            </a:r>
-          </a:p>
-        </p:txBody>
-      </p:sp>
-      <p:sp>
-        <p:nvSpPr>
-          <p:cNvPr id="13" name="TextBox 12"/>
-          <p:cNvSpPr txBox="1"/>
-          <p:nvPr/>
-        </p:nvSpPr>
-        <p:spPr>
-          <a:xfrm>
             <a:off x="11094415" y="6446520"/>
             <a:ext cx="548640" cy="274320"/>
           </a:xfrm>
@@ -6640,41 +6430,6 @@
         </p:nvSpPr>
         <p:spPr>
           <a:xfrm>
-            <a:off x="2194560" y="6446520"/>
-            <a:ext cx="5943600" cy="274320"/>
-          </a:xfrm>
-          <a:prstGeom prst="rect">
-            <a:avLst/>
-          </a:prstGeom>
-          <a:noFill/>
-        </p:spPr>
-        <p:txBody>
-          <a:bodyPr wrap="square" anchor="t" lIns="0" rIns="0" tIns="0" bIns="0">
-            <a:spAutoFit/>
-          </a:bodyPr>
-          <a:lstStyle/>
-          <a:p>
-            <a:pPr algn="l"/>
-            <a:r>
-              <a:rPr sz="1000" b="1" i="0">
-                <a:solidFill>
-                  <a:srgbClr val="8F989D"/>
-                </a:solidFill>
-                <a:latin typeface="Calibri"/>
-              </a:rPr>
-              <a:t>Inicio 5:10 pm</a:t>
-            </a:r>
-          </a:p>
-        </p:txBody>
-      </p:sp>
-      <p:sp>
-        <p:nvSpPr>
-          <p:cNvPr id="13" name="TextBox 12"/>
-          <p:cNvSpPr txBox="1"/>
-          <p:nvPr/>
-        </p:nvSpPr>
-        <p:spPr>
-          <a:xfrm>
             <a:off x="11094415" y="6446520"/>
             <a:ext cx="548640" cy="274320"/>
           </a:xfrm>
@@ -6909,41 +6664,6 @@
         </p:nvSpPr>
         <p:spPr>
           <a:xfrm>
-            <a:off x="2194560" y="6446520"/>
-            <a:ext cx="5943600" cy="274320"/>
-          </a:xfrm>
-          <a:prstGeom prst="rect">
-            <a:avLst/>
-          </a:prstGeom>
-          <a:noFill/>
-        </p:spPr>
-        <p:txBody>
-          <a:bodyPr wrap="square" anchor="t" lIns="0" rIns="0" tIns="0" bIns="0">
-            <a:spAutoFit/>
-          </a:bodyPr>
-          <a:lstStyle/>
-          <a:p>
-            <a:pPr algn="l"/>
-            <a:r>
-              <a:rPr sz="1000" b="1" i="0">
-                <a:solidFill>
-                  <a:srgbClr val="8F989D"/>
-                </a:solidFill>
-                <a:latin typeface="Calibri"/>
-              </a:rPr>
-              <a:t>Inicio 5:10 pm</a:t>
-            </a:r>
-          </a:p>
-        </p:txBody>
-      </p:sp>
-      <p:sp>
-        <p:nvSpPr>
-          <p:cNvPr id="7" name="TextBox 6"/>
-          <p:cNvSpPr txBox="1"/>
-          <p:nvPr/>
-        </p:nvSpPr>
-        <p:spPr>
-          <a:xfrm>
             <a:off x="11094415" y="6446520"/>
             <a:ext cx="548640" cy="274320"/>
           </a:xfrm>
@@ -7365,41 +7085,6 @@
         </p:nvSpPr>
         <p:spPr>
           <a:xfrm>
-            <a:off x="2194560" y="6446520"/>
-            <a:ext cx="5943600" cy="274320"/>
-          </a:xfrm>
-          <a:prstGeom prst="rect">
-            <a:avLst/>
-          </a:prstGeom>
-          <a:noFill/>
-        </p:spPr>
-        <p:txBody>
-          <a:bodyPr wrap="square" anchor="t" lIns="0" rIns="0" tIns="0" bIns="0">
-            <a:spAutoFit/>
-          </a:bodyPr>
-          <a:lstStyle/>
-          <a:p>
-            <a:pPr algn="l"/>
-            <a:r>
-              <a:rPr sz="1000" b="1" i="0">
-                <a:solidFill>
-                  <a:srgbClr val="8F989D"/>
-                </a:solidFill>
-                <a:latin typeface="Calibri"/>
-              </a:rPr>
-              <a:t>Inicio 5:10 pm</a:t>
-            </a:r>
-          </a:p>
-        </p:txBody>
-      </p:sp>
-      <p:sp>
-        <p:nvSpPr>
-          <p:cNvPr id="6" name="TextBox 5"/>
-          <p:cNvSpPr txBox="1"/>
-          <p:nvPr/>
-        </p:nvSpPr>
-        <p:spPr>
-          <a:xfrm>
             <a:off x="11094415" y="6446520"/>
             <a:ext cx="548640" cy="274320"/>
           </a:xfrm>
@@ -7724,41 +7409,6 @@
         </p:nvSpPr>
         <p:spPr>
           <a:xfrm>
-            <a:off x="2194560" y="6446520"/>
-            <a:ext cx="5943600" cy="274320"/>
-          </a:xfrm>
-          <a:prstGeom prst="rect">
-            <a:avLst/>
-          </a:prstGeom>
-          <a:noFill/>
-        </p:spPr>
-        <p:txBody>
-          <a:bodyPr wrap="square" anchor="t" lIns="0" rIns="0" tIns="0" bIns="0">
-            <a:spAutoFit/>
-          </a:bodyPr>
-          <a:lstStyle/>
-          <a:p>
-            <a:pPr algn="l"/>
-            <a:r>
-              <a:rPr sz="1000" b="1" i="0">
-                <a:solidFill>
-                  <a:srgbClr val="8F989D"/>
-                </a:solidFill>
-                <a:latin typeface="Calibri"/>
-              </a:rPr>
-              <a:t>Inicio 5:10 pm</a:t>
-            </a:r>
-          </a:p>
-        </p:txBody>
-      </p:sp>
-      <p:sp>
-        <p:nvSpPr>
-          <p:cNvPr id="6" name="TextBox 5"/>
-          <p:cNvSpPr txBox="1"/>
-          <p:nvPr/>
-        </p:nvSpPr>
-        <p:spPr>
-          <a:xfrm>
             <a:off x="11094415" y="6446520"/>
             <a:ext cx="548640" cy="274320"/>
           </a:xfrm>
@@ -7788,7 +7438,7 @@
       </p:sp>
       <p:sp>
         <p:nvSpPr>
-          <p:cNvPr id="7" name="TextBox 6"/>
+          <p:cNvPr id="6" name="TextBox 5"/>
           <p:cNvSpPr txBox="1"/>
           <p:nvPr/>
         </p:nvSpPr>
@@ -8617,41 +8267,6 @@
         </p:nvSpPr>
         <p:spPr>
           <a:xfrm>
-            <a:off x="2194560" y="6446520"/>
-            <a:ext cx="5943600" cy="274320"/>
-          </a:xfrm>
-          <a:prstGeom prst="rect">
-            <a:avLst/>
-          </a:prstGeom>
-          <a:noFill/>
-        </p:spPr>
-        <p:txBody>
-          <a:bodyPr wrap="square" anchor="t" lIns="0" rIns="0" tIns="0" bIns="0">
-            <a:spAutoFit/>
-          </a:bodyPr>
-          <a:lstStyle/>
-          <a:p>
-            <a:pPr algn="l"/>
-            <a:r>
-              <a:rPr sz="1000" b="1" i="0">
-                <a:solidFill>
-                  <a:srgbClr val="8F989D"/>
-                </a:solidFill>
-                <a:latin typeface="Calibri"/>
-              </a:rPr>
-              <a:t>Inicio 5:10 pm</a:t>
-            </a:r>
-          </a:p>
-        </p:txBody>
-      </p:sp>
-      <p:sp>
-        <p:nvSpPr>
-          <p:cNvPr id="6" name="TextBox 5"/>
-          <p:cNvSpPr txBox="1"/>
-          <p:nvPr/>
-        </p:nvSpPr>
-        <p:spPr>
-          <a:xfrm>
             <a:off x="11094415" y="6446520"/>
             <a:ext cx="548640" cy="274320"/>
           </a:xfrm>
@@ -9103,41 +8718,6 @@
         </p:nvSpPr>
         <p:spPr>
           <a:xfrm>
-            <a:off x="2194560" y="6446520"/>
-            <a:ext cx="5943600" cy="274320"/>
-          </a:xfrm>
-          <a:prstGeom prst="rect">
-            <a:avLst/>
-          </a:prstGeom>
-          <a:noFill/>
-        </p:spPr>
-        <p:txBody>
-          <a:bodyPr wrap="square" anchor="t" lIns="0" rIns="0" tIns="0" bIns="0">
-            <a:spAutoFit/>
-          </a:bodyPr>
-          <a:lstStyle/>
-          <a:p>
-            <a:pPr algn="l"/>
-            <a:r>
-              <a:rPr sz="1000" b="1" i="0">
-                <a:solidFill>
-                  <a:srgbClr val="8F989D"/>
-                </a:solidFill>
-                <a:latin typeface="Calibri"/>
-              </a:rPr>
-              <a:t>Inicio 5:10 pm</a:t>
-            </a:r>
-          </a:p>
-        </p:txBody>
-      </p:sp>
-      <p:sp>
-        <p:nvSpPr>
-          <p:cNvPr id="6" name="TextBox 5"/>
-          <p:cNvSpPr txBox="1"/>
-          <p:nvPr/>
-        </p:nvSpPr>
-        <p:spPr>
-          <a:xfrm>
             <a:off x="11094415" y="6446520"/>
             <a:ext cx="548640" cy="274320"/>
           </a:xfrm>
@@ -9167,7 +8747,7 @@
       </p:sp>
       <p:sp>
         <p:nvSpPr>
-          <p:cNvPr id="7" name="TextBox 6"/>
+          <p:cNvPr id="6" name="TextBox 5"/>
           <p:cNvSpPr txBox="1"/>
           <p:nvPr/>
         </p:nvSpPr>
@@ -9481,41 +9061,6 @@
         </p:nvSpPr>
         <p:spPr>
           <a:xfrm>
-            <a:off x="2194560" y="6446520"/>
-            <a:ext cx="5943600" cy="274320"/>
-          </a:xfrm>
-          <a:prstGeom prst="rect">
-            <a:avLst/>
-          </a:prstGeom>
-          <a:noFill/>
-        </p:spPr>
-        <p:txBody>
-          <a:bodyPr wrap="square" anchor="t" lIns="0" rIns="0" tIns="0" bIns="0">
-            <a:spAutoFit/>
-          </a:bodyPr>
-          <a:lstStyle/>
-          <a:p>
-            <a:pPr algn="l"/>
-            <a:r>
-              <a:rPr sz="1000" b="1" i="0">
-                <a:solidFill>
-                  <a:srgbClr val="8F989D"/>
-                </a:solidFill>
-                <a:latin typeface="Calibri"/>
-              </a:rPr>
-              <a:t>Inicio 5:10 pm</a:t>
-            </a:r>
-          </a:p>
-        </p:txBody>
-      </p:sp>
-      <p:sp>
-        <p:nvSpPr>
-          <p:cNvPr id="6" name="TextBox 5"/>
-          <p:cNvSpPr txBox="1"/>
-          <p:nvPr/>
-        </p:nvSpPr>
-        <p:spPr>
-          <a:xfrm>
             <a:off x="11094415" y="6446520"/>
             <a:ext cx="548640" cy="274320"/>
           </a:xfrm>
@@ -10005,41 +9550,6 @@
         </p:nvSpPr>
         <p:spPr>
           <a:xfrm>
-            <a:off x="2194560" y="6446520"/>
-            <a:ext cx="5943600" cy="274320"/>
-          </a:xfrm>
-          <a:prstGeom prst="rect">
-            <a:avLst/>
-          </a:prstGeom>
-          <a:noFill/>
-        </p:spPr>
-        <p:txBody>
-          <a:bodyPr wrap="square" anchor="t" lIns="0" rIns="0" tIns="0" bIns="0">
-            <a:spAutoFit/>
-          </a:bodyPr>
-          <a:lstStyle/>
-          <a:p>
-            <a:pPr algn="l"/>
-            <a:r>
-              <a:rPr sz="1000" b="1" i="0">
-                <a:solidFill>
-                  <a:srgbClr val="8F989D"/>
-                </a:solidFill>
-                <a:latin typeface="Calibri"/>
-              </a:rPr>
-              <a:t>Inicio 5:10 pm</a:t>
-            </a:r>
-          </a:p>
-        </p:txBody>
-      </p:sp>
-      <p:sp>
-        <p:nvSpPr>
-          <p:cNvPr id="6" name="TextBox 5"/>
-          <p:cNvSpPr txBox="1"/>
-          <p:nvPr/>
-        </p:nvSpPr>
-        <p:spPr>
-          <a:xfrm>
             <a:off x="11094415" y="6446520"/>
             <a:ext cx="548640" cy="274320"/>
           </a:xfrm>
@@ -10286,41 +9796,6 @@
           </a:p>
         </p:txBody>
       </p:sp>
-      <p:sp>
-        <p:nvSpPr>
-          <p:cNvPr id="7" name="TextBox 6"/>
-          <p:cNvSpPr txBox="1"/>
-          <p:nvPr/>
-        </p:nvSpPr>
-        <p:spPr>
-          <a:xfrm>
-            <a:off x="2194560" y="6446520"/>
-            <a:ext cx="5943600" cy="274320"/>
-          </a:xfrm>
-          <a:prstGeom prst="rect">
-            <a:avLst/>
-          </a:prstGeom>
-          <a:noFill/>
-        </p:spPr>
-        <p:txBody>
-          <a:bodyPr wrap="square" anchor="t" lIns="0" rIns="0" tIns="0" bIns="0">
-            <a:spAutoFit/>
-          </a:bodyPr>
-          <a:lstStyle/>
-          <a:p>
-            <a:pPr algn="l"/>
-            <a:r>
-              <a:rPr sz="1000" b="1" i="0">
-                <a:solidFill>
-                  <a:srgbClr val="8F989D"/>
-                </a:solidFill>
-                <a:latin typeface="Calibri"/>
-              </a:rPr>
-              <a:t>Inicio 5:10 pm</a:t>
-            </a:r>
-          </a:p>
-        </p:txBody>
-      </p:sp>
     </p:spTree>
   </p:cSld>
   <p:clrMapOvr>
@@ -10729,41 +10204,6 @@
         </p:nvSpPr>
         <p:spPr>
           <a:xfrm>
-            <a:off x="2194560" y="6446520"/>
-            <a:ext cx="5943600" cy="274320"/>
-          </a:xfrm>
-          <a:prstGeom prst="rect">
-            <a:avLst/>
-          </a:prstGeom>
-          <a:noFill/>
-        </p:spPr>
-        <p:txBody>
-          <a:bodyPr wrap="square" anchor="t" lIns="0" rIns="0" tIns="0" bIns="0">
-            <a:spAutoFit/>
-          </a:bodyPr>
-          <a:lstStyle/>
-          <a:p>
-            <a:pPr algn="l"/>
-            <a:r>
-              <a:rPr sz="1000" b="1" i="0">
-                <a:solidFill>
-                  <a:srgbClr val="8F989D"/>
-                </a:solidFill>
-                <a:latin typeface="Calibri"/>
-              </a:rPr>
-              <a:t>Inicio 5:10 pm</a:t>
-            </a:r>
-          </a:p>
-        </p:txBody>
-      </p:sp>
-      <p:sp>
-        <p:nvSpPr>
-          <p:cNvPr id="6" name="TextBox 5"/>
-          <p:cNvSpPr txBox="1"/>
-          <p:nvPr/>
-        </p:nvSpPr>
-        <p:spPr>
-          <a:xfrm>
             <a:off x="11094415" y="6446520"/>
             <a:ext cx="548640" cy="274320"/>
           </a:xfrm>
@@ -10972,41 +10412,6 @@
       <p:sp>
         <p:nvSpPr>
           <p:cNvPr id="5" name="TextBox 4"/>
-          <p:cNvSpPr txBox="1"/>
-          <p:nvPr/>
-        </p:nvSpPr>
-        <p:spPr>
-          <a:xfrm>
-            <a:off x="2194560" y="6446520"/>
-            <a:ext cx="5943600" cy="274320"/>
-          </a:xfrm>
-          <a:prstGeom prst="rect">
-            <a:avLst/>
-          </a:prstGeom>
-          <a:noFill/>
-        </p:spPr>
-        <p:txBody>
-          <a:bodyPr wrap="square" anchor="t" lIns="0" rIns="0" tIns="0" bIns="0">
-            <a:spAutoFit/>
-          </a:bodyPr>
-          <a:lstStyle/>
-          <a:p>
-            <a:pPr algn="l"/>
-            <a:r>
-              <a:rPr sz="1000" b="1" i="0">
-                <a:solidFill>
-                  <a:srgbClr val="8F989D"/>
-                </a:solidFill>
-                <a:latin typeface="Calibri"/>
-              </a:rPr>
-              <a:t>Inicio 5:10 pm</a:t>
-            </a:r>
-          </a:p>
-        </p:txBody>
-      </p:sp>
-      <p:sp>
-        <p:nvSpPr>
-          <p:cNvPr id="6" name="TextBox 5"/>
           <p:cNvSpPr txBox="1"/>
           <p:nvPr/>
         </p:nvSpPr>
@@ -11890,41 +11295,6 @@
         </p:nvSpPr>
         <p:spPr>
           <a:xfrm>
-            <a:off x="2194560" y="6446520"/>
-            <a:ext cx="5943600" cy="274320"/>
-          </a:xfrm>
-          <a:prstGeom prst="rect">
-            <a:avLst/>
-          </a:prstGeom>
-          <a:noFill/>
-        </p:spPr>
-        <p:txBody>
-          <a:bodyPr wrap="square" anchor="t" lIns="0" rIns="0" tIns="0" bIns="0">
-            <a:spAutoFit/>
-          </a:bodyPr>
-          <a:lstStyle/>
-          <a:p>
-            <a:pPr algn="l"/>
-            <a:r>
-              <a:rPr sz="1000" b="1" i="0">
-                <a:solidFill>
-                  <a:srgbClr val="8F989D"/>
-                </a:solidFill>
-                <a:latin typeface="Calibri"/>
-              </a:rPr>
-              <a:t>Inicio 5:10 pm</a:t>
-            </a:r>
-          </a:p>
-        </p:txBody>
-      </p:sp>
-      <p:sp>
-        <p:nvSpPr>
-          <p:cNvPr id="7" name="TextBox 6"/>
-          <p:cNvSpPr txBox="1"/>
-          <p:nvPr/>
-        </p:nvSpPr>
-        <p:spPr>
-          <a:xfrm>
             <a:off x="11094415" y="6446520"/>
             <a:ext cx="548640" cy="274320"/>
           </a:xfrm>
@@ -12360,41 +11730,6 @@
         </p:nvSpPr>
         <p:spPr>
           <a:xfrm>
-            <a:off x="2194560" y="6446520"/>
-            <a:ext cx="5943600" cy="274320"/>
-          </a:xfrm>
-          <a:prstGeom prst="rect">
-            <a:avLst/>
-          </a:prstGeom>
-          <a:noFill/>
-        </p:spPr>
-        <p:txBody>
-          <a:bodyPr wrap="square" anchor="t" lIns="0" rIns="0" tIns="0" bIns="0">
-            <a:spAutoFit/>
-          </a:bodyPr>
-          <a:lstStyle/>
-          <a:p>
-            <a:pPr algn="l"/>
-            <a:r>
-              <a:rPr sz="1000" b="1" i="0">
-                <a:solidFill>
-                  <a:srgbClr val="8F989D"/>
-                </a:solidFill>
-                <a:latin typeface="Calibri"/>
-              </a:rPr>
-              <a:t>Inicio 5:10 pm</a:t>
-            </a:r>
-          </a:p>
-        </p:txBody>
-      </p:sp>
-      <p:sp>
-        <p:nvSpPr>
-          <p:cNvPr id="6" name="TextBox 5"/>
-          <p:cNvSpPr txBox="1"/>
-          <p:nvPr/>
-        </p:nvSpPr>
-        <p:spPr>
-          <a:xfrm>
             <a:off x="11094415" y="6446520"/>
             <a:ext cx="548640" cy="274320"/>
           </a:xfrm>
@@ -12603,41 +11938,6 @@
       <p:sp>
         <p:nvSpPr>
           <p:cNvPr id="5" name="TextBox 4"/>
-          <p:cNvSpPr txBox="1"/>
-          <p:nvPr/>
-        </p:nvSpPr>
-        <p:spPr>
-          <a:xfrm>
-            <a:off x="2194560" y="6446520"/>
-            <a:ext cx="5943600" cy="274320"/>
-          </a:xfrm>
-          <a:prstGeom prst="rect">
-            <a:avLst/>
-          </a:prstGeom>
-          <a:noFill/>
-        </p:spPr>
-        <p:txBody>
-          <a:bodyPr wrap="square" anchor="t" lIns="0" rIns="0" tIns="0" bIns="0">
-            <a:spAutoFit/>
-          </a:bodyPr>
-          <a:lstStyle/>
-          <a:p>
-            <a:pPr algn="l"/>
-            <a:r>
-              <a:rPr sz="1000" b="1" i="0">
-                <a:solidFill>
-                  <a:srgbClr val="8F989D"/>
-                </a:solidFill>
-                <a:latin typeface="Calibri"/>
-              </a:rPr>
-              <a:t>Inicio 5:10 pm</a:t>
-            </a:r>
-          </a:p>
-        </p:txBody>
-      </p:sp>
-      <p:sp>
-        <p:nvSpPr>
-          <p:cNvPr id="6" name="TextBox 5"/>
           <p:cNvSpPr txBox="1"/>
           <p:nvPr/>
         </p:nvSpPr>
@@ -13386,41 +12686,6 @@
         </p:nvSpPr>
         <p:spPr>
           <a:xfrm>
-            <a:off x="2194560" y="6446520"/>
-            <a:ext cx="5943600" cy="274320"/>
-          </a:xfrm>
-          <a:prstGeom prst="rect">
-            <a:avLst/>
-          </a:prstGeom>
-          <a:noFill/>
-        </p:spPr>
-        <p:txBody>
-          <a:bodyPr wrap="square" anchor="t" lIns="0" rIns="0" tIns="0" bIns="0">
-            <a:spAutoFit/>
-          </a:bodyPr>
-          <a:lstStyle/>
-          <a:p>
-            <a:pPr algn="l"/>
-            <a:r>
-              <a:rPr sz="1000" b="1" i="0">
-                <a:solidFill>
-                  <a:srgbClr val="8F989D"/>
-                </a:solidFill>
-                <a:latin typeface="Calibri"/>
-              </a:rPr>
-              <a:t>Inicio 5:10 pm</a:t>
-            </a:r>
-          </a:p>
-        </p:txBody>
-      </p:sp>
-      <p:sp>
-        <p:nvSpPr>
-          <p:cNvPr id="7" name="TextBox 6"/>
-          <p:cNvSpPr txBox="1"/>
-          <p:nvPr/>
-        </p:nvSpPr>
-        <p:spPr>
-          <a:xfrm>
             <a:off x="11094415" y="6446520"/>
             <a:ext cx="548640" cy="274320"/>
           </a:xfrm>
@@ -13885,41 +13150,6 @@
       <p:sp>
         <p:nvSpPr>
           <p:cNvPr id="5" name="TextBox 4"/>
-          <p:cNvSpPr txBox="1"/>
-          <p:nvPr/>
-        </p:nvSpPr>
-        <p:spPr>
-          <a:xfrm>
-            <a:off x="2194560" y="6446520"/>
-            <a:ext cx="5943600" cy="274320"/>
-          </a:xfrm>
-          <a:prstGeom prst="rect">
-            <a:avLst/>
-          </a:prstGeom>
-          <a:noFill/>
-        </p:spPr>
-        <p:txBody>
-          <a:bodyPr wrap="square" anchor="t" lIns="0" rIns="0" tIns="0" bIns="0">
-            <a:spAutoFit/>
-          </a:bodyPr>
-          <a:lstStyle/>
-          <a:p>
-            <a:pPr algn="l"/>
-            <a:r>
-              <a:rPr sz="1000" b="1" i="0">
-                <a:solidFill>
-                  <a:srgbClr val="8F989D"/>
-                </a:solidFill>
-                <a:latin typeface="Calibri"/>
-              </a:rPr>
-              <a:t>Inicio 5:10 pm</a:t>
-            </a:r>
-          </a:p>
-        </p:txBody>
-      </p:sp>
-      <p:sp>
-        <p:nvSpPr>
-          <p:cNvPr id="6" name="TextBox 5"/>
           <p:cNvSpPr txBox="1"/>
           <p:nvPr/>
         </p:nvSpPr>

--- a/Pregrado/Trabajo de grado 3/Clases/Sesion 14 - Ajustes finales · seguimiento post-sustentación/Presentacion.pptx
+++ b/Pregrado/Trabajo de grado 3/Clases/Sesion 14 - Ajustes finales · seguimiento post-sustentación/Presentacion.pptx
@@ -27,6 +27,7 @@
     <p:sldId id="275" r:id="rId26"/>
     <p:sldId id="276" r:id="rId27"/>
     <p:sldId id="277" r:id="rId28"/>
+    <p:sldId id="278" r:id="rId29"/>
   </p:sldIdLst>
   <p:sldSz cx="12191695" cy="6858000" type="screen4x3"/>
   <p:notesSz cx="6858000" cy="9144000"/>
@@ -3797,7 +3798,7 @@
                           </a:solidFill>
                           <a:latin typeface="Calibri"/>
                         </a:rPr>
-                        <a:t>El artículo entero cuelga de la pregunta</a:t>
+                        <a:t>El documento entero cuelga de la pregunta</a:t>
                       </a:r>
                     </a:p>
                   </a:txBody>
@@ -6791,7 +6792,7 @@
                 </a:solidFill>
                 <a:latin typeface="Calibri"/>
               </a:rPr>
-              <a:t>TALLER — Matriz de ajustes y versión corregida (20 minutos)</a:t>
+              <a:t>TALLER · Matriz de ajustes y versión corregida</a:t>
             </a:r>
           </a:p>
         </p:txBody>
@@ -6804,8 +6805,8 @@
         </p:nvSpPr>
         <p:spPr>
           <a:xfrm>
-            <a:off x="640080" y="1691639"/>
-            <a:ext cx="10911535" cy="4617720"/>
+            <a:off x="640080" y="1280160"/>
+            <a:ext cx="10911535" cy="411480"/>
           </a:xfrm>
           <a:prstGeom prst="rect">
             <a:avLst/>
@@ -6818,6 +6819,41 @@
           </a:bodyPr>
           <a:lstStyle/>
           <a:p>
+            <a:pPr algn="ctr"/>
+            <a:r>
+              <a:rPr sz="1500" b="0" i="0">
+                <a:solidFill>
+                  <a:srgbClr val="2B2B2B"/>
+                </a:solidFill>
+                <a:latin typeface="Calibri"/>
+              </a:rPr>
+              <a:t>Individual · el Docente acompaña resolviendo dudas de clasificación por prioridad</a:t>
+            </a:r>
+          </a:p>
+        </p:txBody>
+      </p:sp>
+      <p:sp>
+        <p:nvSpPr>
+          <p:cNvPr id="5" name="TextBox 4"/>
+          <p:cNvSpPr txBox="1"/>
+          <p:nvPr/>
+        </p:nvSpPr>
+        <p:spPr>
+          <a:xfrm>
+            <a:off x="640080" y="2011679"/>
+            <a:ext cx="10911535" cy="4297680"/>
+          </a:xfrm>
+          <a:prstGeom prst="rect">
+            <a:avLst/>
+          </a:prstGeom>
+          <a:noFill/>
+        </p:spPr>
+        <p:txBody>
+          <a:bodyPr wrap="square" anchor="t" lIns="0" rIns="0" tIns="0" bIns="0">
+            <a:spAutoFit/>
+          </a:bodyPr>
+          <a:lstStyle/>
+          <a:p>
             <a:pPr>
               <a:spcAft>
                 <a:spcPts val="1000"/>
@@ -6839,7 +6875,7 @@
                 </a:solidFill>
                 <a:latin typeface="Calibri"/>
               </a:rPr>
-              <a:t>Consigna literal.</a:t>
+              <a:t>Al final tiene:</a:t>
             </a:r>
             <a:r>
               <a:rPr sz="1600" b="0" i="0">
@@ -6848,197 +6884,7 @@
                 </a:solidFill>
                 <a:latin typeface="Calibri"/>
               </a:rPr>
-              <a:t> Entregue </a:t>
-            </a:r>
-            <a:r>
-              <a:rPr sz="1600" b="1" i="0">
-                <a:solidFill>
-                  <a:srgbClr val="2B2B2B"/>
-                </a:solidFill>
-                <a:latin typeface="Calibri"/>
-              </a:rPr>
-              <a:t>S14_AjustesPost_Apellido</a:t>
-            </a:r>
-            <a:r>
-              <a:rPr sz="1600" b="0" i="0">
-                <a:solidFill>
-                  <a:srgbClr val="2B2B2B"/>
-                </a:solidFill>
-                <a:latin typeface="Calibri"/>
-              </a:rPr>
-              <a:t> con:</a:t>
-            </a:r>
-          </a:p>
-          <a:p>
-            <a:pPr lvl="1">
-              <a:spcAft>
-                <a:spcPts val="600"/>
-              </a:spcAft>
-            </a:pPr>
-            <a:r>
-              <a:rPr sz="1500" b="0" i="0">
-                <a:solidFill>
-                  <a:srgbClr val="2B2B2B"/>
-                </a:solidFill>
-                <a:latin typeface="Calibri"/>
-              </a:rPr>
-              <a:t>●   </a:t>
-            </a:r>
-            <a:r>
-              <a:rPr sz="1500" b="1" i="0">
-                <a:solidFill>
-                  <a:srgbClr val="2B2B2B"/>
-                </a:solidFill>
-                <a:latin typeface="Calibri"/>
-              </a:rPr>
-              <a:t>(1) La matriz de ajustes completa</a:t>
-            </a:r>
-            <a:r>
-              <a:rPr sz="1500" b="0" i="0">
-                <a:solidFill>
-                  <a:srgbClr val="2B2B2B"/>
-                </a:solidFill>
-                <a:latin typeface="Calibri"/>
-              </a:rPr>
-              <a:t>, con las columnas observación · cambio a realizar · prioridad · estado. Debe incluir </a:t>
-            </a:r>
-            <a:r>
-              <a:rPr sz="1500" b="1" i="0">
-                <a:solidFill>
-                  <a:srgbClr val="2B2B2B"/>
-                </a:solidFill>
-                <a:latin typeface="Calibri"/>
-              </a:rPr>
-              <a:t>todas</a:t>
-            </a:r>
-            <a:r>
-              <a:rPr sz="1500" b="0" i="0">
-                <a:solidFill>
-                  <a:srgbClr val="2B2B2B"/>
-                </a:solidFill>
-                <a:latin typeface="Calibri"/>
-              </a:rPr>
-              <a:t> las observaciones recibidas, sin filtrar.</a:t>
-            </a:r>
-          </a:p>
-          <a:p>
-            <a:pPr lvl="1">
-              <a:spcAft>
-                <a:spcPts val="600"/>
-              </a:spcAft>
-            </a:pPr>
-            <a:r>
-              <a:rPr sz="1500" b="0" i="0">
-                <a:solidFill>
-                  <a:srgbClr val="2B2B2B"/>
-                </a:solidFill>
-                <a:latin typeface="Calibri"/>
-              </a:rPr>
-              <a:t>●   </a:t>
-            </a:r>
-            <a:r>
-              <a:rPr sz="1500" b="1" i="0">
-                <a:solidFill>
-                  <a:srgbClr val="2B2B2B"/>
-                </a:solidFill>
-                <a:latin typeface="Calibri"/>
-              </a:rPr>
-              <a:t>(2) Los ajustes CRÍTICOS ya incorporados</a:t>
-            </a:r>
-            <a:r>
-              <a:rPr sz="1500" b="0" i="0">
-                <a:solidFill>
-                  <a:srgbClr val="2B2B2B"/>
-                </a:solidFill>
-                <a:latin typeface="Calibri"/>
-              </a:rPr>
-              <a:t> en el documento del artículo.</a:t>
-            </a:r>
-          </a:p>
-          <a:p>
-            <a:pPr lvl="1">
-              <a:spcAft>
-                <a:spcPts val="600"/>
-              </a:spcAft>
-            </a:pPr>
-            <a:r>
-              <a:rPr sz="1500" b="0" i="0">
-                <a:solidFill>
-                  <a:srgbClr val="2B2B2B"/>
-                </a:solidFill>
-                <a:latin typeface="Calibri"/>
-              </a:rPr>
-              <a:t>●   </a:t>
-            </a:r>
-            <a:r>
-              <a:rPr sz="1500" b="1" i="0">
-                <a:solidFill>
-                  <a:srgbClr val="2B2B2B"/>
-                </a:solidFill>
-                <a:latin typeface="Calibri"/>
-              </a:rPr>
-              <a:t>(3) La revisión del efecto dominó</a:t>
-            </a:r>
-            <a:r>
-              <a:rPr sz="1500" b="0" i="0">
-                <a:solidFill>
-                  <a:srgbClr val="2B2B2B"/>
-                </a:solidFill>
-                <a:latin typeface="Calibri"/>
-              </a:rPr>
-              <a:t> de cada ajuste crítico: qué otras secciones tocó y qué verificó en ellas.</a:t>
-            </a:r>
-          </a:p>
-          <a:p>
-            <a:pPr lvl="1">
-              <a:spcAft>
-                <a:spcPts val="600"/>
-              </a:spcAft>
-            </a:pPr>
-            <a:r>
-              <a:rPr sz="1500" b="0" i="0">
-                <a:solidFill>
-                  <a:srgbClr val="2B2B2B"/>
-                </a:solidFill>
-                <a:latin typeface="Calibri"/>
-              </a:rPr>
-              <a:t>●   </a:t>
-            </a:r>
-            <a:r>
-              <a:rPr sz="1500" b="1" i="0">
-                <a:solidFill>
-                  <a:srgbClr val="2B2B2B"/>
-                </a:solidFill>
-                <a:latin typeface="Calibri"/>
-              </a:rPr>
-              <a:t>(4) Una versión nombrada</a:t>
-            </a:r>
-            <a:r>
-              <a:rPr sz="1500" b="0" i="0">
-                <a:solidFill>
-                  <a:srgbClr val="2B2B2B"/>
-                </a:solidFill>
-                <a:latin typeface="Calibri"/>
-              </a:rPr>
-              <a:t> en el historial de Google Docs: </a:t>
-            </a:r>
-            <a:r>
-              <a:rPr sz="1500" b="1" i="0">
-                <a:solidFill>
-                  <a:srgbClr val="2B2B2B"/>
-                </a:solidFill>
-                <a:latin typeface="Calibri"/>
-              </a:rPr>
-              <a:t>"Ajustes críticos aplicados"</a:t>
-            </a:r>
-            <a:r>
-              <a:rPr sz="1500" b="0" i="0">
-                <a:solidFill>
-                  <a:srgbClr val="2B2B2B"/>
-                </a:solidFill>
-                <a:latin typeface="Calibri"/>
-              </a:rPr>
-              <a:t>. Adjunte la captura del panel de historial.</a:t>
+              <a:t> la matriz con todas las observaciones y los ajustes críticos ya incorporados.</a:t>
             </a:r>
           </a:p>
           <a:p>
@@ -7063,7 +6909,7 @@
                 </a:solidFill>
                 <a:latin typeface="Calibri"/>
               </a:rPr>
-              <a:t>Tiempo:</a:t>
+              <a:t>Paso 1</a:t>
             </a:r>
             <a:r>
               <a:rPr sz="1600" b="0" i="0">
@@ -7072,14 +6918,258 @@
                 </a:solidFill>
                 <a:latin typeface="Calibri"/>
               </a:rPr>
-              <a:t> 20 minutos. El Docente acompaña resolviendo dudas de clasificación por prioridad.</a:t>
-            </a:r>
-          </a:p>
-        </p:txBody>
-      </p:sp>
-      <p:sp>
-        <p:nvSpPr>
-          <p:cNvPr id="5" name="TextBox 4"/>
+              <a:t> · </a:t>
+            </a:r>
+            <a:r>
+              <a:rPr sz="1600" b="1" i="0">
+                <a:solidFill>
+                  <a:srgbClr val="2B2B2B"/>
+                </a:solidFill>
+                <a:latin typeface="Calibri"/>
+              </a:rPr>
+              <a:t>La matriz de ajustes completa</a:t>
+            </a:r>
+            <a:r>
+              <a:rPr sz="1600" b="0" i="0">
+                <a:solidFill>
+                  <a:srgbClr val="2B2B2B"/>
+                </a:solidFill>
+                <a:latin typeface="Calibri"/>
+              </a:rPr>
+              <a:t> —observación · cambio a realizar · prioridad · estado—, con </a:t>
+            </a:r>
+            <a:r>
+              <a:rPr sz="1600" b="1" i="0">
+                <a:solidFill>
+                  <a:srgbClr val="2B2B2B"/>
+                </a:solidFill>
+                <a:latin typeface="Calibri"/>
+              </a:rPr>
+              <a:t>todas</a:t>
+            </a:r>
+            <a:r>
+              <a:rPr sz="1600" b="0" i="0">
+                <a:solidFill>
+                  <a:srgbClr val="2B2B2B"/>
+                </a:solidFill>
+                <a:latin typeface="Calibri"/>
+              </a:rPr>
+              <a:t> las observaciones recibidas, sin filtrar.</a:t>
+            </a:r>
+          </a:p>
+          <a:p>
+            <a:pPr>
+              <a:spcAft>
+                <a:spcPts val="1000"/>
+              </a:spcAft>
+            </a:pPr>
+            <a:r>
+              <a:rPr sz="1600" b="0" i="0">
+                <a:solidFill>
+                  <a:srgbClr val="2B2B2B"/>
+                </a:solidFill>
+                <a:latin typeface="Calibri"/>
+              </a:rPr>
+              <a:t>–   </a:t>
+            </a:r>
+            <a:r>
+              <a:rPr sz="1600" b="1" i="0">
+                <a:solidFill>
+                  <a:srgbClr val="2B2B2B"/>
+                </a:solidFill>
+                <a:latin typeface="Calibri"/>
+              </a:rPr>
+              <a:t>Paso 2</a:t>
+            </a:r>
+            <a:r>
+              <a:rPr sz="1600" b="0" i="0">
+                <a:solidFill>
+                  <a:srgbClr val="2B2B2B"/>
+                </a:solidFill>
+                <a:latin typeface="Calibri"/>
+              </a:rPr>
+              <a:t> · </a:t>
+            </a:r>
+            <a:r>
+              <a:rPr sz="1600" b="1" i="0">
+                <a:solidFill>
+                  <a:srgbClr val="2B2B2B"/>
+                </a:solidFill>
+                <a:latin typeface="Calibri"/>
+              </a:rPr>
+              <a:t>Los ajustes CRÍTICOS ya incorporados</a:t>
+            </a:r>
+            <a:r>
+              <a:rPr sz="1600" b="0" i="0">
+                <a:solidFill>
+                  <a:srgbClr val="2B2B2B"/>
+                </a:solidFill>
+                <a:latin typeface="Calibri"/>
+              </a:rPr>
+              <a:t> en el documento.</a:t>
+            </a:r>
+          </a:p>
+          <a:p>
+            <a:pPr>
+              <a:spcAft>
+                <a:spcPts val="1000"/>
+              </a:spcAft>
+            </a:pPr>
+            <a:r>
+              <a:rPr sz="1600" b="0" i="0">
+                <a:solidFill>
+                  <a:srgbClr val="2B2B2B"/>
+                </a:solidFill>
+                <a:latin typeface="Calibri"/>
+              </a:rPr>
+              <a:t>–   </a:t>
+            </a:r>
+            <a:r>
+              <a:rPr sz="1600" b="1" i="0">
+                <a:solidFill>
+                  <a:srgbClr val="2B2B2B"/>
+                </a:solidFill>
+                <a:latin typeface="Calibri"/>
+              </a:rPr>
+              <a:t>Paso 3</a:t>
+            </a:r>
+            <a:r>
+              <a:rPr sz="1600" b="0" i="0">
+                <a:solidFill>
+                  <a:srgbClr val="2B2B2B"/>
+                </a:solidFill>
+                <a:latin typeface="Calibri"/>
+              </a:rPr>
+              <a:t> · </a:t>
+            </a:r>
+            <a:r>
+              <a:rPr sz="1600" b="1" i="0">
+                <a:solidFill>
+                  <a:srgbClr val="2B2B2B"/>
+                </a:solidFill>
+                <a:latin typeface="Calibri"/>
+              </a:rPr>
+              <a:t>La revisión del efecto dominó</a:t>
+            </a:r>
+            <a:r>
+              <a:rPr sz="1600" b="0" i="0">
+                <a:solidFill>
+                  <a:srgbClr val="2B2B2B"/>
+                </a:solidFill>
+                <a:latin typeface="Calibri"/>
+              </a:rPr>
+              <a:t> de cada ajuste crítico: qué otras secciones tocó y qué verificó en ellas.</a:t>
+            </a:r>
+          </a:p>
+          <a:p>
+            <a:pPr>
+              <a:spcAft>
+                <a:spcPts val="1000"/>
+              </a:spcAft>
+            </a:pPr>
+            <a:r>
+              <a:rPr sz="1600" b="0" i="0">
+                <a:solidFill>
+                  <a:srgbClr val="2B2B2B"/>
+                </a:solidFill>
+                <a:latin typeface="Calibri"/>
+              </a:rPr>
+              <a:t>–   </a:t>
+            </a:r>
+            <a:r>
+              <a:rPr sz="1600" b="1" i="0">
+                <a:solidFill>
+                  <a:srgbClr val="2B2B2B"/>
+                </a:solidFill>
+                <a:latin typeface="Calibri"/>
+              </a:rPr>
+              <a:t>Paso 4</a:t>
+            </a:r>
+            <a:r>
+              <a:rPr sz="1600" b="0" i="0">
+                <a:solidFill>
+                  <a:srgbClr val="2B2B2B"/>
+                </a:solidFill>
+                <a:latin typeface="Calibri"/>
+              </a:rPr>
+              <a:t> · </a:t>
+            </a:r>
+            <a:r>
+              <a:rPr sz="1600" b="1" i="0">
+                <a:solidFill>
+                  <a:srgbClr val="2B2B2B"/>
+                </a:solidFill>
+                <a:latin typeface="Calibri"/>
+              </a:rPr>
+              <a:t>Una versión nombrada</a:t>
+            </a:r>
+            <a:r>
+              <a:rPr sz="1600" b="0" i="0">
+                <a:solidFill>
+                  <a:srgbClr val="2B2B2B"/>
+                </a:solidFill>
+                <a:latin typeface="Calibri"/>
+              </a:rPr>
+              <a:t> en el historial de Google Docs: «Ajustes críticos aplicados». Adjunte la captura del panel de historial.</a:t>
+            </a:r>
+          </a:p>
+          <a:p>
+            <a:pPr>
+              <a:spcAft>
+                <a:spcPts val="1000"/>
+              </a:spcAft>
+            </a:pPr>
+            <a:r>
+              <a:rPr sz="1600" b="0" i="0">
+                <a:solidFill>
+                  <a:srgbClr val="2B2B2B"/>
+                </a:solidFill>
+                <a:latin typeface="Calibri"/>
+              </a:rPr>
+              <a:t>–   </a:t>
+            </a:r>
+            <a:r>
+              <a:rPr sz="1600" b="1" i="0">
+                <a:solidFill>
+                  <a:srgbClr val="2B2B2B"/>
+                </a:solidFill>
+                <a:latin typeface="Calibri"/>
+              </a:rPr>
+              <a:t>En clase, sin falta:</a:t>
+            </a:r>
+            <a:r>
+              <a:rPr sz="1600" b="0" i="0">
+                <a:solidFill>
+                  <a:srgbClr val="2B2B2B"/>
+                </a:solidFill>
+                <a:latin typeface="Calibri"/>
+              </a:rPr>
+              <a:t> los </a:t>
+            </a:r>
+            <a:r>
+              <a:rPr sz="1600" b="1" i="0">
+                <a:solidFill>
+                  <a:srgbClr val="2B2B2B"/>
+                </a:solidFill>
+                <a:latin typeface="Calibri"/>
+              </a:rPr>
+              <a:t>pasos 1 a 2</a:t>
+            </a:r>
+            <a:r>
+              <a:rPr sz="1600" b="0" i="0">
+                <a:solidFill>
+                  <a:srgbClr val="2B2B2B"/>
+                </a:solidFill>
+                <a:latin typeface="Calibri"/>
+              </a:rPr>
+              <a:t>. Del 3 en adelante puede quedar en trabajo autónomo, pero antes de la próxima sesión.</a:t>
+            </a:r>
+          </a:p>
+        </p:txBody>
+      </p:sp>
+      <p:sp>
+        <p:nvSpPr>
+          <p:cNvPr id="6" name="TextBox 5"/>
           <p:cNvSpPr txBox="1"/>
           <p:nvPr/>
         </p:nvSpPr>
@@ -7212,7 +7302,7 @@
                 </a:solidFill>
                 <a:latin typeface="Calibri"/>
               </a:rPr>
-              <a:t>TALLER — Matriz de ajustes y versión corregida (20 minutos) (cont.)</a:t>
+              <a:t>TALLER · cómo se revisa y dónde se entrega</a:t>
             </a:r>
           </a:p>
         </p:txBody>
@@ -7225,8 +7315,8 @@
         </p:nvSpPr>
         <p:spPr>
           <a:xfrm>
-            <a:off x="640080" y="1691639"/>
-            <a:ext cx="10911535" cy="4617720"/>
+            <a:off x="640080" y="1280160"/>
+            <a:ext cx="10911535" cy="411480"/>
           </a:xfrm>
           <a:prstGeom prst="rect">
             <a:avLst/>
@@ -7239,6 +7329,41 @@
           </a:bodyPr>
           <a:lstStyle/>
           <a:p>
+            <a:pPr algn="ctr"/>
+            <a:r>
+              <a:rPr sz="1500" b="0" i="0">
+                <a:solidFill>
+                  <a:srgbClr val="2B2B2B"/>
+                </a:solidFill>
+                <a:latin typeface="Calibri"/>
+              </a:rPr>
+              <a:t>Matriz de ajustes y versión corregida</a:t>
+            </a:r>
+          </a:p>
+        </p:txBody>
+      </p:sp>
+      <p:sp>
+        <p:nvSpPr>
+          <p:cNvPr id="5" name="TextBox 4"/>
+          <p:cNvSpPr txBox="1"/>
+          <p:nvPr/>
+        </p:nvSpPr>
+        <p:spPr>
+          <a:xfrm>
+            <a:off x="640080" y="2011679"/>
+            <a:ext cx="10911535" cy="4297680"/>
+          </a:xfrm>
+          <a:prstGeom prst="rect">
+            <a:avLst/>
+          </a:prstGeom>
+          <a:noFill/>
+        </p:spPr>
+        <p:txBody>
+          <a:bodyPr wrap="square" anchor="t" lIns="0" rIns="0" tIns="0" bIns="0">
+            <a:spAutoFit/>
+          </a:bodyPr>
+          <a:lstStyle/>
+          <a:p>
             <a:pPr>
               <a:spcAft>
                 <a:spcPts val="1000"/>
@@ -7260,7 +7385,16 @@
                 </a:solidFill>
                 <a:latin typeface="Calibri"/>
               </a:rPr>
-              <a:t>Criterio de éxito (verificable):</a:t>
+              <a:t>Quedó bien si</a:t>
+            </a:r>
+            <a:r>
+              <a:rPr sz="1600" b="0" i="0">
+                <a:solidFill>
+                  <a:srgbClr val="2B2B2B"/>
+                </a:solidFill>
+                <a:latin typeface="Calibri"/>
+              </a:rPr>
+              <a:t> —compruébelo usted antes de cerrar el documento—:</a:t>
             </a:r>
           </a:p>
           <a:p>
@@ -7399,11 +7533,239 @@
               <a:t> en el historial antes de los cambios.</a:t>
             </a:r>
           </a:p>
-        </p:txBody>
-      </p:sp>
-      <p:sp>
-        <p:nvSpPr>
-          <p:cNvPr id="5" name="TextBox 4"/>
+          <a:p>
+            <a:pPr>
+              <a:spcAft>
+                <a:spcPts val="1000"/>
+              </a:spcAft>
+            </a:pPr>
+            <a:r>
+              <a:rPr sz="1600" b="0" i="0">
+                <a:solidFill>
+                  <a:srgbClr val="2B2B2B"/>
+                </a:solidFill>
+                <a:latin typeface="Calibri"/>
+              </a:rPr>
+              <a:t>–   </a:t>
+            </a:r>
+            <a:r>
+              <a:rPr sz="1600" b="1" i="0">
+                <a:solidFill>
+                  <a:srgbClr val="2B2B2B"/>
+                </a:solidFill>
+                <a:latin typeface="Calibri"/>
+              </a:rPr>
+              <a:t>Plan B:</a:t>
+            </a:r>
+            <a:r>
+              <a:rPr sz="1600" b="0" i="0">
+                <a:solidFill>
+                  <a:srgbClr val="2B2B2B"/>
+                </a:solidFill>
+                <a:latin typeface="Calibri"/>
+              </a:rPr>
+              <a:t> Si aún no ha sustentado, trabaje con las </a:t>
+            </a:r>
+            <a:r>
+              <a:rPr sz="1600" b="1" i="0">
+                <a:solidFill>
+                  <a:srgbClr val="2B2B2B"/>
+                </a:solidFill>
+                <a:latin typeface="Calibri"/>
+              </a:rPr>
+              <a:t>observaciones del ensayo de la sesión anterior</a:t>
+            </a:r>
+            <a:r>
+              <a:rPr sz="1600" b="0" i="0">
+                <a:solidFill>
+                  <a:srgbClr val="2B2B2B"/>
+                </a:solidFill>
+                <a:latin typeface="Calibri"/>
+              </a:rPr>
+              <a:t> y con lo que su checklist marcó como pendiente: la mecánica es la misma.</a:t>
+            </a:r>
+          </a:p>
+          <a:p>
+            <a:pPr>
+              <a:spcAft>
+                <a:spcPts val="1000"/>
+              </a:spcAft>
+            </a:pPr>
+            <a:r>
+              <a:rPr sz="1600" b="0" i="0">
+                <a:solidFill>
+                  <a:srgbClr val="2B2B2B"/>
+                </a:solidFill>
+                <a:latin typeface="Calibri"/>
+              </a:rPr>
+              <a:t>–   </a:t>
+            </a:r>
+            <a:r>
+              <a:rPr sz="1600" b="1" i="0">
+                <a:solidFill>
+                  <a:srgbClr val="2B2B2B"/>
+                </a:solidFill>
+                <a:latin typeface="Calibri"/>
+              </a:rPr>
+              <a:t>Las entregas documentales del aula ya cerraron:</a:t>
+            </a:r>
+            <a:r>
+              <a:rPr sz="1600" b="0" i="0">
+                <a:solidFill>
+                  <a:srgbClr val="2B2B2B"/>
+                </a:solidFill>
+                <a:latin typeface="Calibri"/>
+              </a:rPr>
+              <a:t> la </a:t>
+            </a:r>
+            <a:r>
+              <a:rPr sz="1600" b="1" i="0">
+                <a:solidFill>
+                  <a:srgbClr val="2B2B2B"/>
+                </a:solidFill>
+                <a:latin typeface="Calibri"/>
+              </a:rPr>
+              <a:t>ACA Final</a:t>
+            </a:r>
+            <a:r>
+              <a:rPr sz="1600" b="0" i="0">
+                <a:solidFill>
+                  <a:srgbClr val="2B2B2B"/>
+                </a:solidFill>
+                <a:latin typeface="Calibri"/>
+              </a:rPr>
+              <a:t> cerró en la semana de la </a:t>
+            </a:r>
+            <a:r>
+              <a:rPr sz="1600" b="1" i="0">
+                <a:solidFill>
+                  <a:srgbClr val="2B2B2B"/>
+                </a:solidFill>
+                <a:latin typeface="Calibri"/>
+              </a:rPr>
+              <a:t>Sesión 13</a:t>
+            </a:r>
+            <a:r>
+              <a:rPr sz="1600" b="0" i="0">
+                <a:solidFill>
+                  <a:srgbClr val="2B2B2B"/>
+                </a:solidFill>
+                <a:latin typeface="Calibri"/>
+              </a:rPr>
+              <a:t>. Guarde `S14_AjustesPost_Apellido` (Google Doc o PDF) en su Drive.</a:t>
+            </a:r>
+          </a:p>
+          <a:p>
+            <a:pPr>
+              <a:spcAft>
+                <a:spcPts val="1000"/>
+              </a:spcAft>
+            </a:pPr>
+            <a:r>
+              <a:rPr sz="1600" b="0" i="0">
+                <a:solidFill>
+                  <a:srgbClr val="2B2B2B"/>
+                </a:solidFill>
+                <a:latin typeface="Calibri"/>
+              </a:rPr>
+              <a:t>–   </a:t>
+            </a:r>
+            <a:r>
+              <a:rPr sz="1600" b="1" i="0">
+                <a:solidFill>
+                  <a:srgbClr val="2B2B2B"/>
+                </a:solidFill>
+                <a:latin typeface="Calibri"/>
+              </a:rPr>
+              <a:t>Esta semana el aula sí espera:</a:t>
+            </a:r>
+            <a:r>
+              <a:rPr sz="1600" b="0" i="0">
+                <a:solidFill>
+                  <a:srgbClr val="2B2B2B"/>
+                </a:solidFill>
+                <a:latin typeface="Calibri"/>
+              </a:rPr>
+              <a:t> </a:t>
+            </a:r>
+            <a:r>
+              <a:rPr sz="1600" b="1" i="0">
+                <a:solidFill>
+                  <a:srgbClr val="2B2B2B"/>
+                </a:solidFill>
+                <a:latin typeface="Calibri"/>
+              </a:rPr>
+              <a:t>Autoevaluación</a:t>
+            </a:r>
+            <a:r>
+              <a:rPr sz="1600" b="0" i="0">
+                <a:solidFill>
+                  <a:srgbClr val="2B2B2B"/>
+                </a:solidFill>
+                <a:latin typeface="Calibri"/>
+              </a:rPr>
+              <a:t> (2%) y </a:t>
+            </a:r>
+            <a:r>
+              <a:rPr sz="1600" b="1" i="0">
+                <a:solidFill>
+                  <a:srgbClr val="2B2B2B"/>
+                </a:solidFill>
+                <a:latin typeface="Calibri"/>
+              </a:rPr>
+              <a:t>Coevaluación</a:t>
+            </a:r>
+            <a:r>
+              <a:rPr sz="1600" b="0" i="0">
+                <a:solidFill>
+                  <a:srgbClr val="2B2B2B"/>
+                </a:solidFill>
+                <a:latin typeface="Calibri"/>
+              </a:rPr>
+              <a:t> (2%). Eso se responde </a:t>
+            </a:r>
+            <a:r>
+              <a:rPr sz="1600" b="1" i="0">
+                <a:solidFill>
+                  <a:srgbClr val="2B2B2B"/>
+                </a:solidFill>
+                <a:latin typeface="Calibri"/>
+              </a:rPr>
+              <a:t>en </a:t>
+            </a:r>
+            <a:r>
+              <a:rPr sz="1600" b="0" i="0">
+                <a:solidFill>
+                  <a:srgbClr val="2B2B2B"/>
+                </a:solidFill>
+                <a:latin typeface="Calibri"/>
+              </a:rPr>
+              <a:t>el aula de su grupo</a:t>
+            </a:r>
+            <a:r>
+              <a:rPr sz="1600" b="1" i="0">
+                <a:solidFill>
+                  <a:srgbClr val="2B2B2B"/>
+                </a:solidFill>
+                <a:latin typeface="Calibri"/>
+              </a:rPr>
+              <a:t> en CDigital</a:t>
+            </a:r>
+            <a:r>
+              <a:rPr sz="1600" b="0" i="0">
+                <a:solidFill>
+                  <a:srgbClr val="2B2B2B"/>
+                </a:solidFill>
+                <a:latin typeface="Calibri"/>
+              </a:rPr>
+              <a:t>, no se sube como archivo.</a:t>
+            </a:r>
+          </a:p>
+        </p:txBody>
+      </p:sp>
+      <p:sp>
+        <p:nvSpPr>
+          <p:cNvPr id="6" name="TextBox 5"/>
           <p:cNvSpPr txBox="1"/>
           <p:nvPr/>
         </p:nvSpPr>
@@ -7432,58 +7794,6 @@
                 <a:latin typeface="Calibri"/>
               </a:rPr>
               <a:t>18</a:t>
-            </a:r>
-          </a:p>
-        </p:txBody>
-      </p:sp>
-      <p:sp>
-        <p:nvSpPr>
-          <p:cNvPr id="6" name="TextBox 5"/>
-          <p:cNvSpPr txBox="1"/>
-          <p:nvPr/>
-        </p:nvSpPr>
-        <p:spPr>
-          <a:xfrm>
-            <a:off x="640080" y="5943600"/>
-            <a:ext cx="9997135" cy="457200"/>
-          </a:xfrm>
-          <a:prstGeom prst="rect">
-            <a:avLst/>
-          </a:prstGeom>
-          <a:noFill/>
-        </p:spPr>
-        <p:txBody>
-          <a:bodyPr wrap="square" anchor="t" lIns="0" rIns="0" tIns="0" bIns="0">
-            <a:spAutoFit/>
-          </a:bodyPr>
-          <a:lstStyle/>
-          <a:p>
-            <a:r>
-              <a:rPr sz="1200" b="0" i="1">
-                <a:solidFill>
-                  <a:srgbClr val="2B2B2B"/>
-                </a:solidFill>
-                <a:latin typeface="Calibri"/>
-              </a:rPr>
-              <a:t>Si aún no ha sustentado, trabaje con las </a:t>
-            </a:r>
-            <a:r>
-              <a:rPr sz="1200" b="1" i="1">
-                <a:solidFill>
-                  <a:srgbClr val="2B2B2B"/>
-                </a:solidFill>
-                <a:latin typeface="Calibri"/>
-              </a:rPr>
-              <a:t>observaciones del ensayo de la sesión anterior</a:t>
-            </a:r>
-            <a:r>
-              <a:rPr sz="1200" b="0" i="1">
-                <a:solidFill>
-                  <a:srgbClr val="2B2B2B"/>
-                </a:solidFill>
-                <a:latin typeface="Calibri"/>
-              </a:rPr>
-              <a:t> y con lo que su propia checklist marcó como pendiente. La mecánica es exactamente la misma.</a:t>
             </a:r>
           </a:p>
         </p:txBody>
@@ -8008,7 +8318,7 @@
                           </a:solidFill>
                           <a:latin typeface="Calibri"/>
                         </a:rPr>
-                        <a:t>Ctrl+F del dato o afirmación en todo el artículo</a:t>
+                        <a:t>Ctrl+F del dato o afirmación en todo el documento</a:t>
                       </a:r>
                     </a:p>
                   </a:txBody>
@@ -8056,7 +8366,7 @@
                           </a:solidFill>
                           <a:latin typeface="Calibri"/>
                         </a:rPr>
-                        <a:t>El resumen sigue siendo espejo del artículo</a:t>
+                        <a:t>El resumen sigue siendo espejo del documento</a:t>
                       </a:r>
                     </a:p>
                   </a:txBody>
@@ -9245,7 +9555,25 @@
                 </a:solidFill>
                 <a:latin typeface="Calibri"/>
               </a:rPr>
-              <a:t> `S14_AjustesPost_Apellido` a CDigital — [URL CDigital — campus del curso pendiente], con la matriz y la versión corregida.</a:t>
+              <a:t> `S14_AjustesPost_Apellido` a CDigital — el aula de </a:t>
+            </a:r>
+            <a:r>
+              <a:rPr sz="1600" b="1" i="0">
+                <a:solidFill>
+                  <a:srgbClr val="2B2B2B"/>
+                </a:solidFill>
+                <a:latin typeface="Calibri"/>
+              </a:rPr>
+              <a:t>su grupo</a:t>
+            </a:r>
+            <a:r>
+              <a:rPr sz="1600" b="0" i="0">
+                <a:solidFill>
+                  <a:srgbClr val="2B2B2B"/>
+                </a:solidFill>
+                <a:latin typeface="Calibri"/>
+              </a:rPr>
+              <a:t> en CDigital, con la matriz y la versión corregida.</a:t>
             </a:r>
           </a:p>
           <a:p>
@@ -9586,6 +9914,1214 @@
 </file>
 
 <file path=ppt/slides/slide22.xml><?xml version="1.0" encoding="utf-8"?>
+<p:sld xmlns:a="http://schemas.openxmlformats.org/drawingml/2006/main" xmlns:p="http://schemas.openxmlformats.org/presentationml/2006/main" xmlns:r="http://schemas.openxmlformats.org/officeDocument/2006/relationships">
+  <p:cSld>
+    <p:bg>
+      <p:bgPr>
+        <a:solidFill>
+          <a:srgbClr val="FFFFFF"/>
+        </a:solidFill>
+        <a:effectLst/>
+      </p:bgPr>
+    </p:bg>
+    <p:spTree>
+      <p:nvGrpSpPr>
+        <p:cNvPr id="1" name=""/>
+        <p:cNvGrpSpPr/>
+        <p:nvPr/>
+      </p:nvGrpSpPr>
+      <p:grpSpPr/>
+      <p:sp>
+        <p:nvSpPr>
+          <p:cNvPr id="2" name="Rectangle 1"/>
+          <p:cNvSpPr/>
+          <p:nvPr/>
+        </p:nvSpPr>
+        <p:spPr>
+          <a:xfrm>
+            <a:off x="0" y="0"/>
+            <a:ext cx="12191695" cy="1188720"/>
+          </a:xfrm>
+          <a:prstGeom prst="rect">
+            <a:avLst/>
+          </a:prstGeom>
+          <a:solidFill>
+            <a:srgbClr val="0C2340"/>
+          </a:solidFill>
+          <a:ln>
+            <a:noFill/>
+          </a:ln>
+          <a:effectLst/>
+        </p:spPr>
+        <p:style>
+          <a:lnRef idx="1">
+            <a:schemeClr val="accent1"/>
+          </a:lnRef>
+          <a:fillRef idx="3">
+            <a:schemeClr val="accent1"/>
+          </a:fillRef>
+          <a:effectRef idx="2">
+            <a:schemeClr val="accent1"/>
+          </a:effectRef>
+          <a:fontRef idx="minor">
+            <a:schemeClr val="lt1"/>
+          </a:fontRef>
+        </p:style>
+        <p:txBody>
+          <a:bodyPr rtlCol="0" anchor="ctr"/>
+          <a:lstStyle/>
+          <a:p>
+            <a:pPr algn="ctr"/>
+          </a:p>
+        </p:txBody>
+      </p:sp>
+      <p:sp>
+        <p:nvSpPr>
+          <p:cNvPr id="3" name="TextBox 2"/>
+          <p:cNvSpPr txBox="1"/>
+          <p:nvPr/>
+        </p:nvSpPr>
+        <p:spPr>
+          <a:xfrm>
+            <a:off x="640080" y="0"/>
+            <a:ext cx="9082735" cy="1188720"/>
+          </a:xfrm>
+          <a:prstGeom prst="rect">
+            <a:avLst/>
+          </a:prstGeom>
+          <a:noFill/>
+        </p:spPr>
+        <p:txBody>
+          <a:bodyPr wrap="square" anchor="ctr" lIns="0" rIns="0" tIns="0" bIns="0">
+            <a:spAutoFit/>
+          </a:bodyPr>
+          <a:lstStyle/>
+          <a:p>
+            <a:pPr algn="ctr"/>
+            <a:r>
+              <a:rPr sz="2600" b="1" i="0">
+                <a:solidFill>
+                  <a:srgbClr val="FFFFFF"/>
+                </a:solidFill>
+                <a:latin typeface="Calibri"/>
+              </a:rPr>
+              <a:t>RUTA DE ENTREGABLES DEL CURSO</a:t>
+            </a:r>
+          </a:p>
+        </p:txBody>
+      </p:sp>
+      <p:sp>
+        <p:nvSpPr>
+          <p:cNvPr id="4" name="TextBox 3"/>
+          <p:cNvSpPr txBox="1"/>
+          <p:nvPr/>
+        </p:nvSpPr>
+        <p:spPr>
+          <a:xfrm>
+            <a:off x="640080" y="1280160"/>
+            <a:ext cx="10911535" cy="411480"/>
+          </a:xfrm>
+          <a:prstGeom prst="rect">
+            <a:avLst/>
+          </a:prstGeom>
+          <a:noFill/>
+        </p:spPr>
+        <p:txBody>
+          <a:bodyPr wrap="square" anchor="t" lIns="0" rIns="0" tIns="0" bIns="0">
+            <a:spAutoFit/>
+          </a:bodyPr>
+          <a:lstStyle/>
+          <a:p>
+            <a:pPr algn="ctr"/>
+            <a:r>
+              <a:rPr sz="1500" b="0" i="0">
+                <a:solidFill>
+                  <a:srgbClr val="2B2B2B"/>
+                </a:solidFill>
+                <a:latin typeface="Calibri"/>
+              </a:rPr>
+              <a:t>Sin fechas a propósito: aquí va </a:t>
+            </a:r>
+            <a:r>
+              <a:rPr sz="1500" b="1" i="0">
+                <a:solidFill>
+                  <a:srgbClr val="2B2B2B"/>
+                </a:solidFill>
+                <a:latin typeface="Calibri"/>
+              </a:rPr>
+              <a:t>en qué punto del curso</a:t>
+            </a:r>
+            <a:r>
+              <a:rPr sz="1500" b="0" i="0">
+                <a:solidFill>
+                  <a:srgbClr val="2B2B2B"/>
+                </a:solidFill>
+                <a:latin typeface="Calibri"/>
+              </a:rPr>
+              <a:t> cierra cada ítem · la ventana exacta la fija CDigital</a:t>
+            </a:r>
+          </a:p>
+        </p:txBody>
+      </p:sp>
+      <p:graphicFrame>
+        <p:nvGraphicFramePr>
+          <p:cNvPr id="5" name="Table 4"/>
+          <p:cNvGraphicFramePr>
+            <a:graphicFrameLocks noGrp="1"/>
+          </p:cNvGraphicFramePr>
+          <p:nvPr/>
+        </p:nvGraphicFramePr>
+        <p:xfrm>
+          <a:off x="640080" y="2011679"/>
+          <a:ext cx="10911533" cy="4297680"/>
+        </p:xfrm>
+        <a:graphic>
+          <a:graphicData uri="http://schemas.openxmlformats.org/drawingml/2006/table">
+            <a:tbl>
+              <a:tblPr>
+                <a:tableStyleId>{2D5ABB26-0587-4C30-8999-92F81FD0307C}</a:tableStyleId>
+              </a:tblPr>
+              <a:tblGrid>
+                <a:gridCol w="2659113"/>
+                <a:gridCol w="2659113"/>
+                <a:gridCol w="5593307"/>
+              </a:tblGrid>
+              <a:tr h="477520">
+                <a:tc>
+                  <a:txBody>
+                    <a:bodyPr/>
+                    <a:lstStyle/>
+                    <a:p>
+                      <a:pPr algn="l"/>
+                      <a:r>
+                        <a:rPr sz="1300" b="1" i="0">
+                          <a:solidFill>
+                            <a:srgbClr val="FFFFFF"/>
+                          </a:solidFill>
+                          <a:latin typeface="Calibri"/>
+                        </a:rPr>
+                        <a:t>Cierra en la semana de…</a:t>
+                      </a:r>
+                    </a:p>
+                  </a:txBody>
+                  <a:tcPr anchor="ctr" marL="109728" marR="91440" marT="36576" marB="36576">
+                    <a:solidFill>
+                      <a:srgbClr val="0C2340"/>
+                    </a:solidFill>
+                  </a:tcPr>
+                </a:tc>
+                <a:tc>
+                  <a:txBody>
+                    <a:bodyPr/>
+                    <a:lstStyle/>
+                    <a:p>
+                      <a:pPr algn="l"/>
+                      <a:r>
+                        <a:rPr sz="1300" b="1" i="0">
+                          <a:solidFill>
+                            <a:srgbClr val="FFFFFF"/>
+                          </a:solidFill>
+                          <a:latin typeface="Calibri"/>
+                        </a:rPr>
+                        <a:t>Entregable</a:t>
+                      </a:r>
+                    </a:p>
+                  </a:txBody>
+                  <a:tcPr anchor="ctr" marL="109728" marR="91440" marT="36576" marB="36576">
+                    <a:solidFill>
+                      <a:srgbClr val="0C2340"/>
+                    </a:solidFill>
+                  </a:tcPr>
+                </a:tc>
+                <a:tc>
+                  <a:txBody>
+                    <a:bodyPr/>
+                    <a:lstStyle/>
+                    <a:p>
+                      <a:pPr algn="l"/>
+                      <a:r>
+                        <a:rPr sz="1300" b="1" i="0">
+                          <a:solidFill>
+                            <a:srgbClr val="FFFFFF"/>
+                          </a:solidFill>
+                          <a:latin typeface="Calibri"/>
+                        </a:rPr>
+                        <a:t>Qué debes tener listo</a:t>
+                      </a:r>
+                    </a:p>
+                  </a:txBody>
+                  <a:tcPr anchor="ctr" marL="109728" marR="91440" marT="36576" marB="36576">
+                    <a:solidFill>
+                      <a:srgbClr val="0C2340"/>
+                    </a:solidFill>
+                  </a:tcPr>
+                </a:tc>
+              </a:tr>
+              <a:tr h="477520">
+                <a:tc>
+                  <a:txBody>
+                    <a:bodyPr/>
+                    <a:lstStyle/>
+                    <a:p>
+                      <a:pPr algn="l"/>
+                      <a:r>
+                        <a:rPr sz="1100" b="1" i="0">
+                          <a:solidFill>
+                            <a:srgbClr val="2B2B2B"/>
+                          </a:solidFill>
+                          <a:latin typeface="Calibri"/>
+                        </a:rPr>
+                        <a:t>Sesión 03</a:t>
+                      </a:r>
+                      <a:r>
+                        <a:rPr sz="1100" b="0" i="0">
+                          <a:solidFill>
+                            <a:srgbClr val="2B2B2B"/>
+                          </a:solidFill>
+                          <a:latin typeface="Calibri"/>
+                        </a:rPr>
+                        <a:t> · ya cerró</a:t>
+                      </a:r>
+                    </a:p>
+                  </a:txBody>
+                  <a:tcPr anchor="ctr" marL="109728" marR="91440" marT="36576" marB="36576">
+                    <a:solidFill>
+                      <a:srgbClr val="FFFFFF"/>
+                    </a:solidFill>
+                  </a:tcPr>
+                </a:tc>
+                <a:tc>
+                  <a:txBody>
+                    <a:bodyPr/>
+                    <a:lstStyle/>
+                    <a:p>
+                      <a:pPr algn="l"/>
+                      <a:r>
+                        <a:rPr sz="1100" b="1" i="0">
+                          <a:solidFill>
+                            <a:srgbClr val="2B2B2B"/>
+                          </a:solidFill>
+                          <a:latin typeface="Calibri"/>
+                        </a:rPr>
+                        <a:t>Quiz 1</a:t>
+                      </a:r>
+                      <a:r>
+                        <a:rPr sz="1100" b="0" i="0">
+                          <a:solidFill>
+                            <a:srgbClr val="2B2B2B"/>
+                          </a:solidFill>
+                          <a:latin typeface="Calibri"/>
+                        </a:rPr>
+                        <a:t> · Cuestionario · 6%</a:t>
+                      </a:r>
+                    </a:p>
+                  </a:txBody>
+                  <a:tcPr anchor="ctr" marL="109728" marR="91440" marT="36576" marB="36576">
+                    <a:solidFill>
+                      <a:srgbClr val="FFFFFF"/>
+                    </a:solidFill>
+                  </a:tcPr>
+                </a:tc>
+                <a:tc>
+                  <a:txBody>
+                    <a:bodyPr/>
+                    <a:lstStyle/>
+                    <a:p>
+                      <a:pPr algn="l"/>
+                      <a:r>
+                        <a:rPr sz="1100" b="0" i="0">
+                          <a:solidFill>
+                            <a:srgbClr val="2B2B2B"/>
+                          </a:solidFill>
+                          <a:latin typeface="Calibri"/>
+                        </a:rPr>
+                        <a:t>Repasa </a:t>
+                      </a:r>
+                      <a:r>
+                        <a:rPr sz="1100" b="1" i="0">
+                          <a:solidFill>
+                            <a:srgbClr val="2B2B2B"/>
+                          </a:solidFill>
+                          <a:latin typeface="Calibri"/>
+                        </a:rPr>
+                        <a:t>pregunta, objetivos y título</a:t>
+                      </a:r>
+                      <a:r>
+                        <a:rPr sz="1100" b="0" i="0">
+                          <a:solidFill>
+                            <a:srgbClr val="2B2B2B"/>
+                          </a:solidFill>
+                          <a:latin typeface="Calibri"/>
+                        </a:rPr>
+                        <a:t> y las variables de la pregunta-problema.</a:t>
+                      </a:r>
+                    </a:p>
+                  </a:txBody>
+                  <a:tcPr anchor="ctr" marL="109728" marR="91440" marT="36576" marB="36576">
+                    <a:solidFill>
+                      <a:srgbClr val="FFFFFF"/>
+                    </a:solidFill>
+                  </a:tcPr>
+                </a:tc>
+              </a:tr>
+              <a:tr h="477520">
+                <a:tc>
+                  <a:txBody>
+                    <a:bodyPr/>
+                    <a:lstStyle/>
+                    <a:p>
+                      <a:pPr algn="l"/>
+                      <a:r>
+                        <a:rPr sz="1100" b="1" i="0">
+                          <a:solidFill>
+                            <a:srgbClr val="2B2B2B"/>
+                          </a:solidFill>
+                          <a:latin typeface="Calibri"/>
+                        </a:rPr>
+                        <a:t>Sesión 06</a:t>
+                      </a:r>
+                      <a:r>
+                        <a:rPr sz="1100" b="0" i="0">
+                          <a:solidFill>
+                            <a:srgbClr val="2B2B2B"/>
+                          </a:solidFill>
+                          <a:latin typeface="Calibri"/>
+                        </a:rPr>
+                        <a:t> · ya cerró</a:t>
+                      </a:r>
+                    </a:p>
+                  </a:txBody>
+                  <a:tcPr anchor="ctr" marL="109728" marR="91440" marT="36576" marB="36576">
+                    <a:solidFill>
+                      <a:srgbClr val="F2F2F2"/>
+                    </a:solidFill>
+                  </a:tcPr>
+                </a:tc>
+                <a:tc>
+                  <a:txBody>
+                    <a:bodyPr/>
+                    <a:lstStyle/>
+                    <a:p>
+                      <a:pPr algn="l"/>
+                      <a:r>
+                        <a:rPr sz="1100" b="1" i="0">
+                          <a:solidFill>
+                            <a:srgbClr val="2B2B2B"/>
+                          </a:solidFill>
+                          <a:latin typeface="Calibri"/>
+                        </a:rPr>
+                        <a:t>Parcial 1</a:t>
+                      </a:r>
+                      <a:r>
+                        <a:rPr sz="1100" b="0" i="0">
+                          <a:solidFill>
+                            <a:srgbClr val="2B2B2B"/>
+                          </a:solidFill>
+                          <a:latin typeface="Calibri"/>
+                        </a:rPr>
+                        <a:t> · Cuestionario · 24%</a:t>
+                      </a:r>
+                    </a:p>
+                  </a:txBody>
+                  <a:tcPr anchor="ctr" marL="109728" marR="91440" marT="36576" marB="36576">
+                    <a:solidFill>
+                      <a:srgbClr val="F2F2F2"/>
+                    </a:solidFill>
+                  </a:tcPr>
+                </a:tc>
+                <a:tc>
+                  <a:txBody>
+                    <a:bodyPr/>
+                    <a:lstStyle/>
+                    <a:p>
+                      <a:pPr algn="l"/>
+                      <a:r>
+                        <a:rPr sz="1100" b="0" i="0">
+                          <a:solidFill>
+                            <a:srgbClr val="2B2B2B"/>
+                          </a:solidFill>
+                          <a:latin typeface="Calibri"/>
+                        </a:rPr>
+                        <a:t>Estudia la </a:t>
+                      </a:r>
+                      <a:r>
+                        <a:rPr sz="1100" b="1" i="0">
+                          <a:solidFill>
+                            <a:srgbClr val="2B2B2B"/>
+                          </a:solidFill>
+                          <a:latin typeface="Calibri"/>
+                        </a:rPr>
+                        <a:t>introducción</a:t>
+                      </a:r>
+                      <a:r>
+                        <a:rPr sz="1100" b="0" i="0">
+                          <a:solidFill>
+                            <a:srgbClr val="2B2B2B"/>
+                          </a:solidFill>
+                          <a:latin typeface="Calibri"/>
+                        </a:rPr>
+                        <a:t>, los referentes Fase I y el instrumento ya diseñado.</a:t>
+                      </a:r>
+                    </a:p>
+                  </a:txBody>
+                  <a:tcPr anchor="ctr" marL="109728" marR="91440" marT="36576" marB="36576">
+                    <a:solidFill>
+                      <a:srgbClr val="F2F2F2"/>
+                    </a:solidFill>
+                  </a:tcPr>
+                </a:tc>
+              </a:tr>
+              <a:tr h="477520">
+                <a:tc>
+                  <a:txBody>
+                    <a:bodyPr/>
+                    <a:lstStyle/>
+                    <a:p>
+                      <a:pPr algn="l"/>
+                      <a:r>
+                        <a:rPr sz="1100" b="1" i="0">
+                          <a:solidFill>
+                            <a:srgbClr val="2B2B2B"/>
+                          </a:solidFill>
+                          <a:latin typeface="Calibri"/>
+                        </a:rPr>
+                        <a:t>Sesión 08</a:t>
+                      </a:r>
+                      <a:r>
+                        <a:rPr sz="1100" b="0" i="0">
+                          <a:solidFill>
+                            <a:srgbClr val="2B2B2B"/>
+                          </a:solidFill>
+                          <a:latin typeface="Calibri"/>
+                        </a:rPr>
+                        <a:t> · ya cerró</a:t>
+                      </a:r>
+                    </a:p>
+                  </a:txBody>
+                  <a:tcPr anchor="ctr" marL="109728" marR="91440" marT="36576" marB="36576">
+                    <a:solidFill>
+                      <a:srgbClr val="FFFFFF"/>
+                    </a:solidFill>
+                  </a:tcPr>
+                </a:tc>
+                <a:tc>
+                  <a:txBody>
+                    <a:bodyPr/>
+                    <a:lstStyle/>
+                    <a:p>
+                      <a:pPr algn="l"/>
+                      <a:r>
+                        <a:rPr sz="1100" b="1" i="0">
+                          <a:solidFill>
+                            <a:srgbClr val="2B2B2B"/>
+                          </a:solidFill>
+                          <a:latin typeface="Calibri"/>
+                        </a:rPr>
+                        <a:t>Quiz 2</a:t>
+                      </a:r>
+                      <a:r>
+                        <a:rPr sz="1100" b="0" i="0">
+                          <a:solidFill>
+                            <a:srgbClr val="2B2B2B"/>
+                          </a:solidFill>
+                          <a:latin typeface="Calibri"/>
+                        </a:rPr>
+                        <a:t> · Cuestionario · 9%</a:t>
+                      </a:r>
+                    </a:p>
+                  </a:txBody>
+                  <a:tcPr anchor="ctr" marL="109728" marR="91440" marT="36576" marB="36576">
+                    <a:solidFill>
+                      <a:srgbClr val="FFFFFF"/>
+                    </a:solidFill>
+                  </a:tcPr>
+                </a:tc>
+                <a:tc>
+                  <a:txBody>
+                    <a:bodyPr/>
+                    <a:lstStyle/>
+                    <a:p>
+                      <a:pPr algn="l"/>
+                      <a:r>
+                        <a:rPr sz="1100" b="0" i="0">
+                          <a:solidFill>
+                            <a:srgbClr val="2B2B2B"/>
+                          </a:solidFill>
+                          <a:latin typeface="Calibri"/>
+                        </a:rPr>
+                        <a:t>Estudia </a:t>
+                      </a:r>
+                      <a:r>
+                        <a:rPr sz="1100" b="1" i="0">
+                          <a:solidFill>
+                            <a:srgbClr val="2B2B2B"/>
+                          </a:solidFill>
+                          <a:latin typeface="Calibri"/>
+                        </a:rPr>
+                        <a:t>comunidades de práctica</a:t>
+                      </a:r>
+                      <a:r>
+                        <a:rPr sz="1100" b="0" i="0">
+                          <a:solidFill>
+                            <a:srgbClr val="2B2B2B"/>
+                          </a:solidFill>
+                          <a:latin typeface="Calibri"/>
+                        </a:rPr>
+                        <a:t>, co-creación y análisis de datos.</a:t>
+                      </a:r>
+                    </a:p>
+                  </a:txBody>
+                  <a:tcPr anchor="ctr" marL="109728" marR="91440" marT="36576" marB="36576">
+                    <a:solidFill>
+                      <a:srgbClr val="FFFFFF"/>
+                    </a:solidFill>
+                  </a:tcPr>
+                </a:tc>
+              </a:tr>
+              <a:tr h="477520">
+                <a:tc>
+                  <a:txBody>
+                    <a:bodyPr/>
+                    <a:lstStyle/>
+                    <a:p>
+                      <a:pPr algn="l"/>
+                      <a:r>
+                        <a:rPr sz="1100" b="1" i="0">
+                          <a:solidFill>
+                            <a:srgbClr val="2B2B2B"/>
+                          </a:solidFill>
+                          <a:latin typeface="Calibri"/>
+                        </a:rPr>
+                        <a:t>Sesión 10</a:t>
+                      </a:r>
+                      <a:r>
+                        <a:rPr sz="1100" b="0" i="0">
+                          <a:solidFill>
+                            <a:srgbClr val="2B2B2B"/>
+                          </a:solidFill>
+                          <a:latin typeface="Calibri"/>
+                        </a:rPr>
+                        <a:t> · ya cerró</a:t>
+                      </a:r>
+                    </a:p>
+                  </a:txBody>
+                  <a:tcPr anchor="ctr" marL="109728" marR="91440" marT="36576" marB="36576">
+                    <a:solidFill>
+                      <a:srgbClr val="F2F2F2"/>
+                    </a:solidFill>
+                  </a:tcPr>
+                </a:tc>
+                <a:tc>
+                  <a:txBody>
+                    <a:bodyPr/>
+                    <a:lstStyle/>
+                    <a:p>
+                      <a:pPr algn="l"/>
+                      <a:r>
+                        <a:rPr sz="1100" b="1" i="0">
+                          <a:solidFill>
+                            <a:srgbClr val="2B2B2B"/>
+                          </a:solidFill>
+                          <a:latin typeface="Calibri"/>
+                        </a:rPr>
+                        <a:t>Parcial 2</a:t>
+                      </a:r>
+                      <a:r>
+                        <a:rPr sz="1100" b="0" i="0">
+                          <a:solidFill>
+                            <a:srgbClr val="2B2B2B"/>
+                          </a:solidFill>
+                          <a:latin typeface="Calibri"/>
+                        </a:rPr>
+                        <a:t> · Cuestionario · 21%</a:t>
+                      </a:r>
+                    </a:p>
+                  </a:txBody>
+                  <a:tcPr anchor="ctr" marL="109728" marR="91440" marT="36576" marB="36576">
+                    <a:solidFill>
+                      <a:srgbClr val="F2F2F2"/>
+                    </a:solidFill>
+                  </a:tcPr>
+                </a:tc>
+                <a:tc>
+                  <a:txBody>
+                    <a:bodyPr/>
+                    <a:lstStyle/>
+                    <a:p>
+                      <a:pPr algn="l"/>
+                      <a:r>
+                        <a:rPr sz="1100" b="0" i="0">
+                          <a:solidFill>
+                            <a:srgbClr val="2B2B2B"/>
+                          </a:solidFill>
+                          <a:latin typeface="Calibri"/>
+                        </a:rPr>
+                        <a:t>Estudia el cierre del </a:t>
+                      </a:r>
+                      <a:r>
+                        <a:rPr sz="1100" b="1" i="0">
+                          <a:solidFill>
+                            <a:srgbClr val="2B2B2B"/>
+                          </a:solidFill>
+                          <a:latin typeface="Calibri"/>
+                        </a:rPr>
+                        <a:t>marco teórico</a:t>
+                      </a:r>
+                      <a:r>
+                        <a:rPr sz="1100" b="0" i="0">
+                          <a:solidFill>
+                            <a:srgbClr val="2B2B2B"/>
+                          </a:solidFill>
+                          <a:latin typeface="Calibri"/>
+                        </a:rPr>
+                        <a:t>, los resultados y la discusión.</a:t>
+                      </a:r>
+                    </a:p>
+                  </a:txBody>
+                  <a:tcPr anchor="ctr" marL="109728" marR="91440" marT="36576" marB="36576">
+                    <a:solidFill>
+                      <a:srgbClr val="F2F2F2"/>
+                    </a:solidFill>
+                  </a:tcPr>
+                </a:tc>
+              </a:tr>
+              <a:tr h="477520">
+                <a:tc>
+                  <a:txBody>
+                    <a:bodyPr/>
+                    <a:lstStyle/>
+                    <a:p>
+                      <a:pPr algn="l"/>
+                      <a:r>
+                        <a:rPr sz="1100" b="1" i="0">
+                          <a:solidFill>
+                            <a:srgbClr val="2B2B2B"/>
+                          </a:solidFill>
+                          <a:latin typeface="Calibri"/>
+                        </a:rPr>
+                        <a:t>Sesión 12</a:t>
+                      </a:r>
+                      <a:r>
+                        <a:rPr sz="1100" b="0" i="0">
+                          <a:solidFill>
+                            <a:srgbClr val="2B2B2B"/>
+                          </a:solidFill>
+                          <a:latin typeface="Calibri"/>
+                        </a:rPr>
+                        <a:t> · ya cerró</a:t>
+                      </a:r>
+                    </a:p>
+                  </a:txBody>
+                  <a:tcPr anchor="ctr" marL="109728" marR="91440" marT="36576" marB="36576">
+                    <a:solidFill>
+                      <a:srgbClr val="FFFFFF"/>
+                    </a:solidFill>
+                  </a:tcPr>
+                </a:tc>
+                <a:tc>
+                  <a:txBody>
+                    <a:bodyPr/>
+                    <a:lstStyle/>
+                    <a:p>
+                      <a:pPr algn="l"/>
+                      <a:r>
+                        <a:rPr sz="1100" b="1" i="0">
+                          <a:solidFill>
+                            <a:srgbClr val="2B2B2B"/>
+                          </a:solidFill>
+                          <a:latin typeface="Calibri"/>
+                        </a:rPr>
+                        <a:t>Quiz 3</a:t>
+                      </a:r>
+                      <a:r>
+                        <a:rPr sz="1100" b="0" i="0">
+                          <a:solidFill>
+                            <a:srgbClr val="2B2B2B"/>
+                          </a:solidFill>
+                          <a:latin typeface="Calibri"/>
+                        </a:rPr>
+                        <a:t> · Cuestionario · 4%</a:t>
+                      </a:r>
+                    </a:p>
+                  </a:txBody>
+                  <a:tcPr anchor="ctr" marL="109728" marR="91440" marT="36576" marB="36576">
+                    <a:solidFill>
+                      <a:srgbClr val="FFFFFF"/>
+                    </a:solidFill>
+                  </a:tcPr>
+                </a:tc>
+                <a:tc>
+                  <a:txBody>
+                    <a:bodyPr/>
+                    <a:lstStyle/>
+                    <a:p>
+                      <a:pPr algn="l"/>
+                      <a:r>
+                        <a:rPr sz="1100" b="0" i="0">
+                          <a:solidFill>
+                            <a:srgbClr val="2B2B2B"/>
+                          </a:solidFill>
+                          <a:latin typeface="Calibri"/>
+                        </a:rPr>
+                        <a:t>Ten claros </a:t>
+                      </a:r>
+                      <a:r>
+                        <a:rPr sz="1100" b="1" i="0">
+                          <a:solidFill>
+                            <a:srgbClr val="2B2B2B"/>
+                          </a:solidFill>
+                          <a:latin typeface="Calibri"/>
+                        </a:rPr>
+                        <a:t>resumen</a:t>
+                      </a:r>
+                      <a:r>
+                        <a:rPr sz="1100" b="0" i="0">
+                          <a:solidFill>
+                            <a:srgbClr val="2B2B2B"/>
+                          </a:solidFill>
+                          <a:latin typeface="Calibri"/>
+                        </a:rPr>
+                        <a:t>, palabras clave UNESCO, póster y verificación antiplagio.</a:t>
+                      </a:r>
+                    </a:p>
+                  </a:txBody>
+                  <a:tcPr anchor="ctr" marL="109728" marR="91440" marT="36576" marB="36576">
+                    <a:solidFill>
+                      <a:srgbClr val="FFFFFF"/>
+                    </a:solidFill>
+                  </a:tcPr>
+                </a:tc>
+              </a:tr>
+              <a:tr h="477520">
+                <a:tc>
+                  <a:txBody>
+                    <a:bodyPr/>
+                    <a:lstStyle/>
+                    <a:p>
+                      <a:pPr algn="l"/>
+                      <a:r>
+                        <a:rPr sz="1100" b="1" i="0">
+                          <a:solidFill>
+                            <a:srgbClr val="2B2B2B"/>
+                          </a:solidFill>
+                          <a:latin typeface="Calibri"/>
+                        </a:rPr>
+                        <a:t>Sesión 13</a:t>
+                      </a:r>
+                      <a:r>
+                        <a:rPr sz="1100" b="0" i="0">
+                          <a:solidFill>
+                            <a:srgbClr val="2B2B2B"/>
+                          </a:solidFill>
+                          <a:latin typeface="Calibri"/>
+                        </a:rPr>
+                        <a:t> · ya cerró</a:t>
+                      </a:r>
+                    </a:p>
+                  </a:txBody>
+                  <a:tcPr anchor="ctr" marL="109728" marR="91440" marT="36576" marB="36576">
+                    <a:solidFill>
+                      <a:srgbClr val="F2F2F2"/>
+                    </a:solidFill>
+                  </a:tcPr>
+                </a:tc>
+                <a:tc>
+                  <a:txBody>
+                    <a:bodyPr/>
+                    <a:lstStyle/>
+                    <a:p>
+                      <a:pPr algn="l"/>
+                      <a:r>
+                        <a:rPr sz="1100" b="1" i="0">
+                          <a:solidFill>
+                            <a:srgbClr val="2B2B2B"/>
+                          </a:solidFill>
+                          <a:latin typeface="Calibri"/>
+                        </a:rPr>
+                        <a:t>ACA Final</a:t>
+                      </a:r>
+                      <a:r>
+                        <a:rPr sz="1100" b="0" i="0">
+                          <a:solidFill>
+                            <a:srgbClr val="2B2B2B"/>
+                          </a:solidFill>
+                          <a:latin typeface="Calibri"/>
+                        </a:rPr>
+                        <a:t> · Tarea · 32%</a:t>
+                      </a:r>
+                    </a:p>
+                  </a:txBody>
+                  <a:tcPr anchor="ctr" marL="109728" marR="91440" marT="36576" marB="36576">
+                    <a:solidFill>
+                      <a:srgbClr val="F2F2F2"/>
+                    </a:solidFill>
+                  </a:tcPr>
+                </a:tc>
+                <a:tc>
+                  <a:txBody>
+                    <a:bodyPr/>
+                    <a:lstStyle/>
+                    <a:p>
+                      <a:pPr algn="l"/>
+                      <a:r>
+                        <a:rPr sz="1100" b="0" i="0">
+                          <a:solidFill>
+                            <a:srgbClr val="2B2B2B"/>
+                          </a:solidFill>
+                          <a:latin typeface="Calibri"/>
+                        </a:rPr>
+                        <a:t>Sube el </a:t>
+                      </a:r>
+                      <a:r>
+                        <a:rPr sz="1100" b="1" i="0">
+                          <a:solidFill>
+                            <a:srgbClr val="2B2B2B"/>
+                          </a:solidFill>
+                          <a:latin typeface="Calibri"/>
+                        </a:rPr>
+                        <a:t>documento final</a:t>
+                      </a:r>
+                      <a:r>
+                        <a:rPr sz="1100" b="0" i="0">
+                          <a:solidFill>
+                            <a:srgbClr val="2B2B2B"/>
+                          </a:solidFill>
+                          <a:latin typeface="Calibri"/>
+                        </a:rPr>
+                        <a:t> en plantilla APA CUN: mínimo 4.000 palabras y 50 referencias.</a:t>
+                      </a:r>
+                    </a:p>
+                  </a:txBody>
+                  <a:tcPr anchor="ctr" marL="109728" marR="91440" marT="36576" marB="36576">
+                    <a:solidFill>
+                      <a:srgbClr val="F2F2F2"/>
+                    </a:solidFill>
+                  </a:tcPr>
+                </a:tc>
+              </a:tr>
+              <a:tr h="477520">
+                <a:tc>
+                  <a:txBody>
+                    <a:bodyPr/>
+                    <a:lstStyle/>
+                    <a:p>
+                      <a:pPr algn="l"/>
+                      <a:r>
+                        <a:rPr sz="1100" b="1" i="0">
+                          <a:solidFill>
+                            <a:srgbClr val="2B2B2B"/>
+                          </a:solidFill>
+                          <a:latin typeface="Calibri"/>
+                        </a:rPr>
+                        <a:t>Sesión 14</a:t>
+                      </a:r>
+                      <a:r>
+                        <a:rPr sz="1100" b="0" i="0">
+                          <a:solidFill>
+                            <a:srgbClr val="2B2B2B"/>
+                          </a:solidFill>
+                          <a:latin typeface="Calibri"/>
+                        </a:rPr>
+                        <a:t> · cierra esta semana</a:t>
+                      </a:r>
+                    </a:p>
+                  </a:txBody>
+                  <a:tcPr anchor="ctr" marL="109728" marR="91440" marT="36576" marB="36576">
+                    <a:solidFill>
+                      <a:srgbClr val="FFFFFF"/>
+                    </a:solidFill>
+                  </a:tcPr>
+                </a:tc>
+                <a:tc>
+                  <a:txBody>
+                    <a:bodyPr/>
+                    <a:lstStyle/>
+                    <a:p>
+                      <a:pPr algn="l"/>
+                      <a:r>
+                        <a:rPr sz="1100" b="1" i="0">
+                          <a:solidFill>
+                            <a:srgbClr val="2B2B2B"/>
+                          </a:solidFill>
+                          <a:latin typeface="Calibri"/>
+                        </a:rPr>
+                        <a:t>Autoevaluación</a:t>
+                      </a:r>
+                      <a:r>
+                        <a:rPr sz="1100" b="0" i="0">
+                          <a:solidFill>
+                            <a:srgbClr val="2B2B2B"/>
+                          </a:solidFill>
+                          <a:latin typeface="Calibri"/>
+                        </a:rPr>
+                        <a:t> · Cuestionario · 2%</a:t>
+                      </a:r>
+                    </a:p>
+                  </a:txBody>
+                  <a:tcPr anchor="ctr" marL="109728" marR="91440" marT="36576" marB="36576">
+                    <a:solidFill>
+                      <a:srgbClr val="FFFFFF"/>
+                    </a:solidFill>
+                  </a:tcPr>
+                </a:tc>
+                <a:tc>
+                  <a:txBody>
+                    <a:bodyPr/>
+                    <a:lstStyle/>
+                    <a:p>
+                      <a:pPr algn="l"/>
+                      <a:r>
+                        <a:rPr sz="1100" b="0" i="0">
+                          <a:solidFill>
+                            <a:srgbClr val="2B2B2B"/>
+                          </a:solidFill>
+                          <a:latin typeface="Calibri"/>
+                        </a:rPr>
+                        <a:t>Diligénciala </a:t>
+                      </a:r>
+                      <a:r>
+                        <a:rPr sz="1100" b="1" i="0">
+                          <a:solidFill>
+                            <a:srgbClr val="2B2B2B"/>
+                          </a:solidFill>
+                          <a:latin typeface="Calibri"/>
+                        </a:rPr>
+                        <a:t>tú</a:t>
+                      </a:r>
+                      <a:r>
+                        <a:rPr sz="1100" b="0" i="0">
+                          <a:solidFill>
+                            <a:srgbClr val="2B2B2B"/>
+                          </a:solidFill>
+                          <a:latin typeface="Calibri"/>
+                        </a:rPr>
+                        <a:t>, dentro de su ventana, sobre tu participación real.</a:t>
+                      </a:r>
+                    </a:p>
+                  </a:txBody>
+                  <a:tcPr anchor="ctr" marL="109728" marR="91440" marT="36576" marB="36576">
+                    <a:solidFill>
+                      <a:srgbClr val="FFFFFF"/>
+                    </a:solidFill>
+                  </a:tcPr>
+                </a:tc>
+              </a:tr>
+              <a:tr h="477520">
+                <a:tc>
+                  <a:txBody>
+                    <a:bodyPr/>
+                    <a:lstStyle/>
+                    <a:p>
+                      <a:pPr algn="l"/>
+                      <a:r>
+                        <a:rPr sz="1100" b="1" i="0">
+                          <a:solidFill>
+                            <a:srgbClr val="2B2B2B"/>
+                          </a:solidFill>
+                          <a:latin typeface="Calibri"/>
+                        </a:rPr>
+                        <a:t>Sesión 14</a:t>
+                      </a:r>
+                      <a:r>
+                        <a:rPr sz="1100" b="0" i="0">
+                          <a:solidFill>
+                            <a:srgbClr val="2B2B2B"/>
+                          </a:solidFill>
+                          <a:latin typeface="Calibri"/>
+                        </a:rPr>
+                        <a:t> · cierra esta semana</a:t>
+                      </a:r>
+                    </a:p>
+                  </a:txBody>
+                  <a:tcPr anchor="ctr" marL="109728" marR="91440" marT="36576" marB="36576">
+                    <a:solidFill>
+                      <a:srgbClr val="F2F2F2"/>
+                    </a:solidFill>
+                  </a:tcPr>
+                </a:tc>
+                <a:tc>
+                  <a:txBody>
+                    <a:bodyPr/>
+                    <a:lstStyle/>
+                    <a:p>
+                      <a:pPr algn="l"/>
+                      <a:r>
+                        <a:rPr sz="1100" b="1" i="0">
+                          <a:solidFill>
+                            <a:srgbClr val="2B2B2B"/>
+                          </a:solidFill>
+                          <a:latin typeface="Calibri"/>
+                        </a:rPr>
+                        <a:t>Coevaluación</a:t>
+                      </a:r>
+                      <a:r>
+                        <a:rPr sz="1100" b="0" i="0">
+                          <a:solidFill>
+                            <a:srgbClr val="2B2B2B"/>
+                          </a:solidFill>
+                          <a:latin typeface="Calibri"/>
+                        </a:rPr>
+                        <a:t> · Foro · 2%</a:t>
+                      </a:r>
+                    </a:p>
+                  </a:txBody>
+                  <a:tcPr anchor="ctr" marL="109728" marR="91440" marT="36576" marB="36576">
+                    <a:solidFill>
+                      <a:srgbClr val="F2F2F2"/>
+                    </a:solidFill>
+                  </a:tcPr>
+                </a:tc>
+                <a:tc>
+                  <a:txBody>
+                    <a:bodyPr/>
+                    <a:lstStyle/>
+                    <a:p>
+                      <a:pPr algn="l"/>
+                      <a:r>
+                        <a:rPr sz="1100" b="1" i="0">
+                          <a:solidFill>
+                            <a:srgbClr val="2B2B2B"/>
+                          </a:solidFill>
+                          <a:latin typeface="Calibri"/>
+                        </a:rPr>
+                        <a:t>Publica</a:t>
+                      </a:r>
+                      <a:r>
+                        <a:rPr sz="1100" b="0" i="0">
+                          <a:solidFill>
+                            <a:srgbClr val="2B2B2B"/>
+                          </a:solidFill>
+                          <a:latin typeface="Calibri"/>
+                        </a:rPr>
+                        <a:t> tu aporte dentro de la ventana: un borrador sin enviar no cuenta.</a:t>
+                      </a:r>
+                    </a:p>
+                  </a:txBody>
+                  <a:tcPr anchor="ctr" marL="109728" marR="91440" marT="36576" marB="36576">
+                    <a:solidFill>
+                      <a:srgbClr val="F2F2F2"/>
+                    </a:solidFill>
+                  </a:tcPr>
+                </a:tc>
+              </a:tr>
+            </a:tbl>
+          </a:graphicData>
+        </a:graphic>
+      </p:graphicFrame>
+      <p:sp>
+        <p:nvSpPr>
+          <p:cNvPr id="6" name="TextBox 5"/>
+          <p:cNvSpPr txBox="1"/>
+          <p:nvPr/>
+        </p:nvSpPr>
+        <p:spPr>
+          <a:xfrm>
+            <a:off x="640080" y="6080760"/>
+            <a:ext cx="10911535" cy="548640"/>
+          </a:xfrm>
+          <a:prstGeom prst="rect">
+            <a:avLst/>
+          </a:prstGeom>
+          <a:noFill/>
+        </p:spPr>
+        <p:txBody>
+          <a:bodyPr wrap="square" anchor="t" lIns="0" rIns="0" tIns="0" bIns="0">
+            <a:spAutoFit/>
+          </a:bodyPr>
+          <a:lstStyle/>
+          <a:p>
+            <a:r>
+              <a:rPr sz="1200" b="0" i="1">
+                <a:solidFill>
+                  <a:srgbClr val="2B2B2B"/>
+                </a:solidFill>
+                <a:latin typeface="Calibri"/>
+              </a:rPr>
+              <a:t>Esta misma tabla va al final de todas las sesiones. La </a:t>
+            </a:r>
+            <a:r>
+              <a:rPr sz="1200" b="1" i="1">
+                <a:solidFill>
+                  <a:srgbClr val="2B2B2B"/>
+                </a:solidFill>
+                <a:latin typeface="Calibri"/>
+              </a:rPr>
+              <a:t>fecha</a:t>
+            </a:r>
+            <a:r>
+              <a:rPr sz="1200" b="0" i="1">
+                <a:solidFill>
+                  <a:srgbClr val="2B2B2B"/>
+                </a:solidFill>
+                <a:latin typeface="Calibri"/>
+              </a:rPr>
+              <a:t> de cada ventana está en el enunciado del ítem (`Clases/Recursos/ACAs/`) y en el aula: si el aula y cualquier otro material se contradicen, </a:t>
+            </a:r>
+            <a:r>
+              <a:rPr sz="1200" b="1" i="1">
+                <a:solidFill>
+                  <a:srgbClr val="2B2B2B"/>
+                </a:solidFill>
+                <a:latin typeface="Calibri"/>
+              </a:rPr>
+              <a:t>manda el aula</a:t>
+            </a:r>
+            <a:r>
+              <a:rPr sz="1200" b="0" i="1">
+                <a:solidFill>
+                  <a:srgbClr val="2B2B2B"/>
+                </a:solidFill>
+                <a:latin typeface="Calibri"/>
+              </a:rPr>
+              <a:t>.</a:t>
+            </a:r>
+          </a:p>
+        </p:txBody>
+      </p:sp>
+      <p:sp>
+        <p:nvSpPr>
+          <p:cNvPr id="7" name="TextBox 6"/>
+          <p:cNvSpPr txBox="1"/>
+          <p:nvPr/>
+        </p:nvSpPr>
+        <p:spPr>
+          <a:xfrm>
+            <a:off x="11094415" y="6446520"/>
+            <a:ext cx="548640" cy="274320"/>
+          </a:xfrm>
+          <a:prstGeom prst="rect">
+            <a:avLst/>
+          </a:prstGeom>
+          <a:noFill/>
+        </p:spPr>
+        <p:txBody>
+          <a:bodyPr wrap="square" anchor="t" lIns="0" rIns="0" tIns="0" bIns="0">
+            <a:spAutoFit/>
+          </a:bodyPr>
+          <a:lstStyle/>
+          <a:p>
+            <a:pPr algn="r"/>
+            <a:r>
+              <a:rPr sz="1000" b="1" i="0">
+                <a:solidFill>
+                  <a:srgbClr val="8F989D"/>
+                </a:solidFill>
+                <a:latin typeface="Calibri"/>
+              </a:rPr>
+              <a:t>22</a:t>
+            </a:r>
+          </a:p>
+        </p:txBody>
+      </p:sp>
+    </p:spTree>
+  </p:cSld>
+  <p:clrMapOvr>
+    <a:masterClrMapping/>
+  </p:clrMapOvr>
+</p:sld>
+</file>
+
+<file path=ppt/slides/slide23.xml><?xml version="1.0" encoding="utf-8"?>
 <p:sld xmlns:a="http://schemas.openxmlformats.org/drawingml/2006/main" xmlns:p="http://schemas.openxmlformats.org/presentationml/2006/main" xmlns:r="http://schemas.openxmlformats.org/officeDocument/2006/relationships">
   <p:cSld>
     <p:bg>
@@ -12990,7 +14526,7 @@
                 </a:solidFill>
                 <a:latin typeface="Calibri"/>
               </a:rPr>
-              <a:t>●   Si solo lo cambia en resultados, el artículo se contradice a sí mismo. Y eso sí lo ve cualquiera.</a:t>
+              <a:t>●   Si solo lo cambia en resultados, el documento se contradice a sí mismo. Y eso sí lo ve cualquiera.</a:t>
             </a:r>
           </a:p>
           <a:p>
@@ -13108,7 +14644,7 @@
                 </a:solidFill>
                 <a:latin typeface="Calibri"/>
               </a:rPr>
-              <a:t> del artículo corregido?</a:t>
+              <a:t> del documento corregido?</a:t>
             </a:r>
           </a:p>
           <a:p>
